--- a/public/fun/pack/pptx/birthday/돌잔치_38_사진중심_군고구마골목.pptx
+++ b/public/fun/pack/pptx/birthday/돌잔치_38_사진중심_군고구마골목.pptx
@@ -3286,14 +3286,6 @@
 <file path=ppt/slides/slide1.xml><?xml version="1.0" encoding="utf-8"?>
 <p:sld xmlns:a="http://schemas.openxmlformats.org/drawingml/2006/main" xmlns:p="http://schemas.openxmlformats.org/presentationml/2006/main" xmlns:r="http://schemas.openxmlformats.org/officeDocument/2006/relationships">
   <p:cSld>
-    <p:bg>
-      <p:bgPr>
-        <a:solidFill>
-          <a:srgbClr val="FBF3EF"/>
-        </a:solidFill>
-        <a:effectLst/>
-      </p:bgPr>
-    </p:bg>
     <p:spTree>
       <p:nvGrpSpPr>
         <p:cNvPr id="1" name=""/>
@@ -3301,383 +3293,30 @@
         <p:nvPr/>
       </p:nvGrpSpPr>
       <p:grpSpPr/>
-      <p:sp>
-        <p:nvSpPr>
-          <p:cNvPr id="3" name="장식"/>
-          <p:cNvSpPr/>
+      <p:pic>
+        <p:nvPicPr>
+          <p:cNvPr id="3" name="표지 그림" descr="birthday-38.jpg"/>
+          <p:cNvPicPr>
+            <a:picLocks noChangeAspect="1"/>
+          </p:cNvPicPr>
           <p:nvPr/>
-        </p:nvSpPr>
-        <p:spPr>
-          <a:xfrm>
-            <a:off x="274320" y="274320"/>
-            <a:ext cx="11643055" cy="6309360"/>
+        </p:nvPicPr>
+        <p:blipFill>
+          <a:blip r:embed="rId2"/>
+          <a:stretch>
+            <a:fillRect/>
+          </a:stretch>
+        </p:blipFill>
+        <p:spPr>
+          <a:xfrm>
+            <a:off x="0" y="0"/>
+            <a:ext cx="12191695" cy="6858000"/>
           </a:xfrm>
           <a:prstGeom prst="rect">
             <a:avLst/>
           </a:prstGeom>
-          <a:noFill/>
-          <a:ln w="38100">
-            <a:solidFill>
-              <a:srgbClr val="995229"/>
-            </a:solidFill>
-          </a:ln>
-        </p:spPr>
-        <p:txBody>
-          <a:bodyPr rtlCol="0" anchor="ctr"/>
-          <a:lstStyle/>
-          <a:p>
-            <a:pPr algn="ctr"/>
-          </a:p>
-        </p:txBody>
-      </p:sp>
-      <p:sp>
-        <p:nvSpPr>
-          <p:cNvPr id="4" name="장식"/>
-          <p:cNvSpPr/>
-          <p:nvPr/>
-        </p:nvSpPr>
-        <p:spPr>
-          <a:xfrm>
-            <a:off x="457200" y="457200"/>
-            <a:ext cx="11277295" cy="5943600"/>
-          </a:xfrm>
-          <a:prstGeom prst="rect">
-            <a:avLst/>
-          </a:prstGeom>
-          <a:noFill/>
-          <a:ln w="12700">
-            <a:solidFill>
-              <a:srgbClr val="F4DBCD"/>
-            </a:solidFill>
-          </a:ln>
-        </p:spPr>
-        <p:txBody>
-          <a:bodyPr rtlCol="0" anchor="ctr"/>
-          <a:lstStyle/>
-          <a:p>
-            <a:pPr algn="ctr"/>
-          </a:p>
-        </p:txBody>
-      </p:sp>
-      <p:sp>
-        <p:nvSpPr>
-          <p:cNvPr id="5" name="장식"/>
-          <p:cNvSpPr/>
-          <p:nvPr/>
-        </p:nvSpPr>
-        <p:spPr>
-          <a:xfrm>
-            <a:off x="5854364" y="780551"/>
-            <a:ext cx="333470" cy="333470"/>
-          </a:xfrm>
-          <a:prstGeom prst="ellipse">
-            <a:avLst/>
-          </a:prstGeom>
-          <a:solidFill>
-            <a:srgbClr val="995229"/>
-          </a:solidFill>
-          <a:ln>
-            <a:noFill/>
-          </a:ln>
-        </p:spPr>
-        <p:txBody>
-          <a:bodyPr rtlCol="0" anchor="ctr"/>
-          <a:lstStyle/>
-          <a:p>
-            <a:pPr algn="ctr"/>
-          </a:p>
-        </p:txBody>
-      </p:sp>
-      <p:sp>
-        <p:nvSpPr>
-          <p:cNvPr id="6" name="장식"/>
-          <p:cNvSpPr/>
-          <p:nvPr/>
-        </p:nvSpPr>
-        <p:spPr>
-          <a:xfrm>
-            <a:off x="6892061" y="1623191"/>
-            <a:ext cx="200163" cy="200163"/>
-          </a:xfrm>
-          <a:prstGeom prst="ellipse">
-            <a:avLst/>
-          </a:prstGeom>
-          <a:solidFill>
-            <a:srgbClr val="F4DBCD"/>
-          </a:solidFill>
-          <a:ln>
-            <a:noFill/>
-          </a:ln>
-        </p:spPr>
-        <p:txBody>
-          <a:bodyPr rtlCol="0" anchor="ctr"/>
-          <a:lstStyle/>
-          <a:p>
-            <a:pPr algn="ctr"/>
-          </a:p>
-        </p:txBody>
-      </p:sp>
-      <p:sp>
-        <p:nvSpPr>
-          <p:cNvPr id="7" name="장식"/>
-          <p:cNvSpPr/>
-          <p:nvPr/>
-        </p:nvSpPr>
-        <p:spPr>
-          <a:xfrm>
-            <a:off x="5120089" y="1161505"/>
-            <a:ext cx="263527" cy="263527"/>
-          </a:xfrm>
-          <a:prstGeom prst="ellipse">
-            <a:avLst/>
-          </a:prstGeom>
-          <a:solidFill>
-            <a:srgbClr val="3B9185"/>
-          </a:solidFill>
-          <a:ln>
-            <a:noFill/>
-          </a:ln>
-        </p:spPr>
-        <p:txBody>
-          <a:bodyPr rtlCol="0" anchor="ctr"/>
-          <a:lstStyle/>
-          <a:p>
-            <a:pPr algn="ctr"/>
-          </a:p>
-        </p:txBody>
-      </p:sp>
-      <p:sp>
-        <p:nvSpPr>
-          <p:cNvPr id="8" name="장식"/>
-          <p:cNvSpPr/>
-          <p:nvPr/>
-        </p:nvSpPr>
-        <p:spPr>
-          <a:xfrm>
-            <a:off x="6364859" y="758859"/>
-            <a:ext cx="216496" cy="216496"/>
-          </a:xfrm>
-          <a:prstGeom prst="ellipse">
-            <a:avLst/>
-          </a:prstGeom>
-          <a:solidFill>
-            <a:srgbClr val="995229"/>
-          </a:solidFill>
-          <a:ln>
-            <a:noFill/>
-          </a:ln>
-        </p:spPr>
-        <p:txBody>
-          <a:bodyPr rtlCol="0" anchor="ctr"/>
-          <a:lstStyle/>
-          <a:p>
-            <a:pPr algn="ctr"/>
-          </a:p>
-        </p:txBody>
-      </p:sp>
-      <p:sp>
-        <p:nvSpPr>
-          <p:cNvPr id="9" name="장식"/>
-          <p:cNvSpPr/>
-          <p:nvPr/>
-        </p:nvSpPr>
-        <p:spPr>
-          <a:xfrm>
-            <a:off x="6068545" y="360190"/>
-            <a:ext cx="334832" cy="334832"/>
-          </a:xfrm>
-          <a:prstGeom prst="ellipse">
-            <a:avLst/>
-          </a:prstGeom>
-          <a:solidFill>
-            <a:srgbClr val="F4DBCD"/>
-          </a:solidFill>
-          <a:ln>
-            <a:noFill/>
-          </a:ln>
-        </p:spPr>
-        <p:txBody>
-          <a:bodyPr rtlCol="0" anchor="ctr"/>
-          <a:lstStyle/>
-          <a:p>
-            <a:pPr algn="ctr"/>
-          </a:p>
-        </p:txBody>
-      </p:sp>
-      <p:sp>
-        <p:nvSpPr>
-          <p:cNvPr id="10" name="장식"/>
-          <p:cNvSpPr/>
-          <p:nvPr/>
-        </p:nvSpPr>
-        <p:spPr>
-          <a:xfrm>
-            <a:off x="5437401" y="825259"/>
-            <a:ext cx="143688" cy="143688"/>
-          </a:xfrm>
-          <a:prstGeom prst="ellipse">
-            <a:avLst/>
-          </a:prstGeom>
-          <a:solidFill>
-            <a:srgbClr val="3B9185"/>
-          </a:solidFill>
-          <a:ln>
-            <a:noFill/>
-          </a:ln>
-        </p:spPr>
-        <p:txBody>
-          <a:bodyPr rtlCol="0" anchor="ctr"/>
-          <a:lstStyle/>
-          <a:p>
-            <a:pPr algn="ctr"/>
-          </a:p>
-        </p:txBody>
-      </p:sp>
-      <p:sp>
-        <p:nvSpPr>
-          <p:cNvPr id="11" name="장식"/>
-          <p:cNvSpPr/>
-          <p:nvPr/>
-        </p:nvSpPr>
-        <p:spPr>
-          <a:xfrm>
-            <a:off x="6550618" y="2104327"/>
-            <a:ext cx="285402" cy="285402"/>
-          </a:xfrm>
-          <a:prstGeom prst="ellipse">
-            <a:avLst/>
-          </a:prstGeom>
-          <a:solidFill>
-            <a:srgbClr val="995229"/>
-          </a:solidFill>
-          <a:ln>
-            <a:noFill/>
-          </a:ln>
-        </p:spPr>
-        <p:txBody>
-          <a:bodyPr rtlCol="0" anchor="ctr"/>
-          <a:lstStyle/>
-          <a:p>
-            <a:pPr algn="ctr"/>
-          </a:p>
-        </p:txBody>
-      </p:sp>
-      <p:sp>
-        <p:nvSpPr>
-          <p:cNvPr id="12" name="장식"/>
-          <p:cNvSpPr/>
-          <p:nvPr/>
-        </p:nvSpPr>
-        <p:spPr>
-          <a:xfrm>
-            <a:off x="6115670" y="917740"/>
-            <a:ext cx="267797" cy="267797"/>
-          </a:xfrm>
-          <a:prstGeom prst="ellipse">
-            <a:avLst/>
-          </a:prstGeom>
-          <a:solidFill>
-            <a:srgbClr val="F4DBCD"/>
-          </a:solidFill>
-          <a:ln>
-            <a:noFill/>
-          </a:ln>
-        </p:spPr>
-        <p:txBody>
-          <a:bodyPr rtlCol="0" anchor="ctr"/>
-          <a:lstStyle/>
-          <a:p>
-            <a:pPr algn="ctr"/>
-          </a:p>
-        </p:txBody>
-      </p:sp>
-      <p:sp>
-        <p:nvSpPr>
-          <p:cNvPr id="13" name="장식"/>
-          <p:cNvSpPr/>
-          <p:nvPr/>
-        </p:nvSpPr>
-        <p:spPr>
-          <a:xfrm>
-            <a:off x="6642241" y="1444838"/>
-            <a:ext cx="284342" cy="284342"/>
-          </a:xfrm>
-          <a:prstGeom prst="ellipse">
-            <a:avLst/>
-          </a:prstGeom>
-          <a:solidFill>
-            <a:srgbClr val="3B9185"/>
-          </a:solidFill>
-          <a:ln>
-            <a:noFill/>
-          </a:ln>
-        </p:spPr>
-        <p:txBody>
-          <a:bodyPr rtlCol="0" anchor="ctr"/>
-          <a:lstStyle/>
-          <a:p>
-            <a:pPr algn="ctr"/>
-          </a:p>
-        </p:txBody>
-      </p:sp>
-      <p:sp>
-        <p:nvSpPr>
-          <p:cNvPr id="14" name="장식"/>
-          <p:cNvSpPr/>
-          <p:nvPr/>
-        </p:nvSpPr>
-        <p:spPr>
-          <a:xfrm>
-            <a:off x="5561757" y="750724"/>
-            <a:ext cx="180660" cy="180660"/>
-          </a:xfrm>
-          <a:prstGeom prst="ellipse">
-            <a:avLst/>
-          </a:prstGeom>
-          <a:solidFill>
-            <a:srgbClr val="995229"/>
-          </a:solidFill>
-          <a:ln>
-            <a:noFill/>
-          </a:ln>
-        </p:spPr>
-        <p:txBody>
-          <a:bodyPr rtlCol="0" anchor="ctr"/>
-          <a:lstStyle/>
-          <a:p>
-            <a:pPr algn="ctr"/>
-          </a:p>
-        </p:txBody>
-      </p:sp>
-      <p:sp>
-        <p:nvSpPr>
-          <p:cNvPr id="15" name="장식"/>
-          <p:cNvSpPr/>
-          <p:nvPr/>
-        </p:nvSpPr>
-        <p:spPr>
-          <a:xfrm>
-            <a:off x="5279103" y="941758"/>
-            <a:ext cx="124614" cy="124614"/>
-          </a:xfrm>
-          <a:prstGeom prst="ellipse">
-            <a:avLst/>
-          </a:prstGeom>
-          <a:solidFill>
-            <a:srgbClr val="F4DBCD"/>
-          </a:solidFill>
-          <a:ln>
-            <a:noFill/>
-          </a:ln>
-        </p:spPr>
-        <p:txBody>
-          <a:bodyPr rtlCol="0" anchor="ctr"/>
-          <a:lstStyle/>
-          <a:p>
-            <a:pPr algn="ctr"/>
-          </a:p>
-        </p:txBody>
-      </p:sp>
+        </p:spPr>
+      </p:pic>
       <p:sp>
         <p:nvSpPr>
           <p:cNvPr id="2" name="Title 1"/>
@@ -3690,8 +3329,8 @@
         </p:nvSpPr>
         <p:spPr>
           <a:xfrm>
-            <a:off x="1463003" y="2331720"/>
-            <a:ext cx="9265688" cy="1371600"/>
+            <a:off x="853418" y="2057400"/>
+            <a:ext cx="6095847" cy="1554480"/>
           </a:xfrm>
         </p:spPr>
         <p:txBody>
@@ -3700,7 +3339,7 @@
           </a:bodyPr>
           <a:lstStyle/>
           <a:p>
-            <a:pPr algn="ctr">
+            <a:pPr algn="l">
               <a:lnSpc>
                 <a:spcPct val="105000"/>
               </a:lnSpc>
@@ -3718,14 +3357,14 @@
       </p:sp>
       <p:sp>
         <p:nvSpPr>
-          <p:cNvPr id="16" name="한 줄 문구"/>
+          <p:cNvPr id="4" name="한 줄 문구"/>
           <p:cNvSpPr txBox="1"/>
           <p:nvPr/>
         </p:nvSpPr>
         <p:spPr>
           <a:xfrm>
-            <a:off x="1463003" y="3794760"/>
-            <a:ext cx="9265688" cy="822960"/>
+            <a:off x="853418" y="3749039"/>
+            <a:ext cx="6095847" cy="822960"/>
           </a:xfrm>
           <a:prstGeom prst="rect">
             <a:avLst/>
@@ -3738,7 +3377,7 @@
           </a:bodyPr>
           <a:lstStyle/>
           <a:p>
-            <a:pPr algn="ctr">
+            <a:pPr algn="l">
               <a:lnSpc>
                 <a:spcPct val="115000"/>
               </a:lnSpc>
@@ -3749,21 +3388,21 @@
                   <a:srgbClr val="492713"/>
                 </a:solidFill>
               </a:rPr>
-              <a:t>군고구마처럼 따뜻하고 달콤한 아기</a:t>
-            </a:r>
-          </a:p>
-        </p:txBody>
-      </p:sp>
-      <p:sp>
-        <p:nvSpPr>
-          <p:cNvPr id="17" name="안내 문구"/>
+              <a:t>가족사진 한 장은 꼭 남기려 합니다</a:t>
+            </a:r>
+          </a:p>
+        </p:txBody>
+      </p:sp>
+      <p:sp>
+        <p:nvSpPr>
+          <p:cNvPr id="5" name="안내 문구"/>
           <p:cNvSpPr txBox="1"/>
           <p:nvPr/>
         </p:nvSpPr>
         <p:spPr>
           <a:xfrm>
-            <a:off x="1463003" y="4663440"/>
-            <a:ext cx="9265688" cy="914400"/>
+            <a:off x="853418" y="4617720"/>
+            <a:ext cx="6095847" cy="914400"/>
           </a:xfrm>
           <a:prstGeom prst="rect">
             <a:avLst/>
@@ -3776,7 +3415,7 @@
           </a:bodyPr>
           <a:lstStyle/>
           <a:p>
-            <a:pPr algn="ctr">
+            <a:pPr algn="l">
               <a:lnSpc>
                 <a:spcPct val="115000"/>
               </a:lnSpc>
@@ -3787,11 +3426,11 @@
                   <a:srgbClr val="666666"/>
                 </a:solidFill>
               </a:rPr>
-              <a:t>아기 이름 · 2026. 00. 00</a:t>
-            </a:r>
-          </a:p>
-          <a:p>
-            <a:pPr algn="ctr">
+              <a:t>아기 이름 · 2027. 00. 00</a:t>
+            </a:r>
+          </a:p>
+          <a:p>
+            <a:pPr algn="l">
               <a:lnSpc>
                 <a:spcPct val="115000"/>
               </a:lnSpc>
@@ -3893,325 +3532,6 @@
       </p:sp>
       <p:sp>
         <p:nvSpPr>
-          <p:cNvPr id="5" name="장식"/>
-          <p:cNvSpPr/>
-          <p:nvPr/>
-        </p:nvSpPr>
-        <p:spPr>
-          <a:xfrm>
-            <a:off x="10914538" y="631759"/>
-            <a:ext cx="185261" cy="185261"/>
-          </a:xfrm>
-          <a:prstGeom prst="ellipse">
-            <a:avLst/>
-          </a:prstGeom>
-          <a:solidFill>
-            <a:srgbClr val="995229"/>
-          </a:solidFill>
-          <a:ln>
-            <a:noFill/>
-          </a:ln>
-        </p:spPr>
-        <p:txBody>
-          <a:bodyPr rtlCol="0" anchor="ctr"/>
-          <a:lstStyle/>
-          <a:p>
-            <a:pPr algn="ctr"/>
-          </a:p>
-        </p:txBody>
-      </p:sp>
-      <p:sp>
-        <p:nvSpPr>
-          <p:cNvPr id="6" name="장식"/>
-          <p:cNvSpPr/>
-          <p:nvPr/>
-        </p:nvSpPr>
-        <p:spPr>
-          <a:xfrm>
-            <a:off x="11491036" y="1099893"/>
-            <a:ext cx="111201" cy="111201"/>
-          </a:xfrm>
-          <a:prstGeom prst="ellipse">
-            <a:avLst/>
-          </a:prstGeom>
-          <a:solidFill>
-            <a:srgbClr val="F4DBCD"/>
-          </a:solidFill>
-          <a:ln>
-            <a:noFill/>
-          </a:ln>
-        </p:spPr>
-        <p:txBody>
-          <a:bodyPr rtlCol="0" anchor="ctr"/>
-          <a:lstStyle/>
-          <a:p>
-            <a:pPr algn="ctr"/>
-          </a:p>
-        </p:txBody>
-      </p:sp>
-      <p:sp>
-        <p:nvSpPr>
-          <p:cNvPr id="7" name="장식"/>
-          <p:cNvSpPr/>
-          <p:nvPr/>
-        </p:nvSpPr>
-        <p:spPr>
-          <a:xfrm>
-            <a:off x="10506607" y="843400"/>
-            <a:ext cx="146404" cy="146404"/>
-          </a:xfrm>
-          <a:prstGeom prst="ellipse">
-            <a:avLst/>
-          </a:prstGeom>
-          <a:solidFill>
-            <a:srgbClr val="3B9185"/>
-          </a:solidFill>
-          <a:ln>
-            <a:noFill/>
-          </a:ln>
-        </p:spPr>
-        <p:txBody>
-          <a:bodyPr rtlCol="0" anchor="ctr"/>
-          <a:lstStyle/>
-          <a:p>
-            <a:pPr algn="ctr"/>
-          </a:p>
-        </p:txBody>
-      </p:sp>
-      <p:sp>
-        <p:nvSpPr>
-          <p:cNvPr id="8" name="장식"/>
-          <p:cNvSpPr/>
-          <p:nvPr/>
-        </p:nvSpPr>
-        <p:spPr>
-          <a:xfrm>
-            <a:off x="11198146" y="619708"/>
-            <a:ext cx="120275" cy="120275"/>
-          </a:xfrm>
-          <a:prstGeom prst="ellipse">
-            <a:avLst/>
-          </a:prstGeom>
-          <a:solidFill>
-            <a:srgbClr val="995229"/>
-          </a:solidFill>
-          <a:ln>
-            <a:noFill/>
-          </a:ln>
-        </p:spPr>
-        <p:txBody>
-          <a:bodyPr rtlCol="0" anchor="ctr"/>
-          <a:lstStyle/>
-          <a:p>
-            <a:pPr algn="ctr"/>
-          </a:p>
-        </p:txBody>
-      </p:sp>
-      <p:sp>
-        <p:nvSpPr>
-          <p:cNvPr id="9" name="장식"/>
-          <p:cNvSpPr/>
-          <p:nvPr/>
-        </p:nvSpPr>
-        <p:spPr>
-          <a:xfrm>
-            <a:off x="11033527" y="398225"/>
-            <a:ext cx="186017" cy="186017"/>
-          </a:xfrm>
-          <a:prstGeom prst="ellipse">
-            <a:avLst/>
-          </a:prstGeom>
-          <a:solidFill>
-            <a:srgbClr val="F4DBCD"/>
-          </a:solidFill>
-          <a:ln>
-            <a:noFill/>
-          </a:ln>
-        </p:spPr>
-        <p:txBody>
-          <a:bodyPr rtlCol="0" anchor="ctr"/>
-          <a:lstStyle/>
-          <a:p>
-            <a:pPr algn="ctr"/>
-          </a:p>
-        </p:txBody>
-      </p:sp>
-      <p:sp>
-        <p:nvSpPr>
-          <p:cNvPr id="10" name="장식"/>
-          <p:cNvSpPr/>
-          <p:nvPr/>
-        </p:nvSpPr>
-        <p:spPr>
-          <a:xfrm>
-            <a:off x="10682891" y="656597"/>
-            <a:ext cx="79826" cy="79826"/>
-          </a:xfrm>
-          <a:prstGeom prst="ellipse">
-            <a:avLst/>
-          </a:prstGeom>
-          <a:solidFill>
-            <a:srgbClr val="3B9185"/>
-          </a:solidFill>
-          <a:ln>
-            <a:noFill/>
-          </a:ln>
-        </p:spPr>
-        <p:txBody>
-          <a:bodyPr rtlCol="0" anchor="ctr"/>
-          <a:lstStyle/>
-          <a:p>
-            <a:pPr algn="ctr"/>
-          </a:p>
-        </p:txBody>
-      </p:sp>
-      <p:sp>
-        <p:nvSpPr>
-          <p:cNvPr id="11" name="장식"/>
-          <p:cNvSpPr/>
-          <p:nvPr/>
-        </p:nvSpPr>
-        <p:spPr>
-          <a:xfrm>
-            <a:off x="11301345" y="1367190"/>
-            <a:ext cx="158557" cy="158557"/>
-          </a:xfrm>
-          <a:prstGeom prst="ellipse">
-            <a:avLst/>
-          </a:prstGeom>
-          <a:solidFill>
-            <a:srgbClr val="995229"/>
-          </a:solidFill>
-          <a:ln>
-            <a:noFill/>
-          </a:ln>
-        </p:spPr>
-        <p:txBody>
-          <a:bodyPr rtlCol="0" anchor="ctr"/>
-          <a:lstStyle/>
-          <a:p>
-            <a:pPr algn="ctr"/>
-          </a:p>
-        </p:txBody>
-      </p:sp>
-      <p:sp>
-        <p:nvSpPr>
-          <p:cNvPr id="12" name="장식"/>
-          <p:cNvSpPr/>
-          <p:nvPr/>
-        </p:nvSpPr>
-        <p:spPr>
-          <a:xfrm>
-            <a:off x="11059707" y="707976"/>
-            <a:ext cx="148776" cy="148776"/>
-          </a:xfrm>
-          <a:prstGeom prst="ellipse">
-            <a:avLst/>
-          </a:prstGeom>
-          <a:solidFill>
-            <a:srgbClr val="F4DBCD"/>
-          </a:solidFill>
-          <a:ln>
-            <a:noFill/>
-          </a:ln>
-        </p:spPr>
-        <p:txBody>
-          <a:bodyPr rtlCol="0" anchor="ctr"/>
-          <a:lstStyle/>
-          <a:p>
-            <a:pPr algn="ctr"/>
-          </a:p>
-        </p:txBody>
-      </p:sp>
-      <p:sp>
-        <p:nvSpPr>
-          <p:cNvPr id="13" name="장식"/>
-          <p:cNvSpPr/>
-          <p:nvPr/>
-        </p:nvSpPr>
-        <p:spPr>
-          <a:xfrm>
-            <a:off x="11352247" y="1000807"/>
-            <a:ext cx="157967" cy="157967"/>
-          </a:xfrm>
-          <a:prstGeom prst="ellipse">
-            <a:avLst/>
-          </a:prstGeom>
-          <a:solidFill>
-            <a:srgbClr val="3B9185"/>
-          </a:solidFill>
-          <a:ln>
-            <a:noFill/>
-          </a:ln>
-        </p:spPr>
-        <p:txBody>
-          <a:bodyPr rtlCol="0" anchor="ctr"/>
-          <a:lstStyle/>
-          <a:p>
-            <a:pPr algn="ctr"/>
-          </a:p>
-        </p:txBody>
-      </p:sp>
-      <p:sp>
-        <p:nvSpPr>
-          <p:cNvPr id="14" name="장식"/>
-          <p:cNvSpPr/>
-          <p:nvPr/>
-        </p:nvSpPr>
-        <p:spPr>
-          <a:xfrm>
-            <a:off x="10751978" y="615189"/>
-            <a:ext cx="100367" cy="100367"/>
-          </a:xfrm>
-          <a:prstGeom prst="ellipse">
-            <a:avLst/>
-          </a:prstGeom>
-          <a:solidFill>
-            <a:srgbClr val="995229"/>
-          </a:solidFill>
-          <a:ln>
-            <a:noFill/>
-          </a:ln>
-        </p:spPr>
-        <p:txBody>
-          <a:bodyPr rtlCol="0" anchor="ctr"/>
-          <a:lstStyle/>
-          <a:p>
-            <a:pPr algn="ctr"/>
-          </a:p>
-        </p:txBody>
-      </p:sp>
-      <p:sp>
-        <p:nvSpPr>
-          <p:cNvPr id="15" name="장식"/>
-          <p:cNvSpPr/>
-          <p:nvPr/>
-        </p:nvSpPr>
-        <p:spPr>
-          <a:xfrm>
-            <a:off x="10594948" y="721318"/>
-            <a:ext cx="69230" cy="69230"/>
-          </a:xfrm>
-          <a:prstGeom prst="ellipse">
-            <a:avLst/>
-          </a:prstGeom>
-          <a:solidFill>
-            <a:srgbClr val="F4DBCD"/>
-          </a:solidFill>
-          <a:ln>
-            <a:noFill/>
-          </a:ln>
-        </p:spPr>
-        <p:txBody>
-          <a:bodyPr rtlCol="0" anchor="ctr"/>
-          <a:lstStyle/>
-          <a:p>
-            <a:pPr algn="ctr"/>
-          </a:p>
-        </p:txBody>
-      </p:sp>
-      <p:sp>
-        <p:nvSpPr>
           <p:cNvPr id="2" name="Title 1"/>
           <p:cNvSpPr>
             <a:spLocks noGrp="1"/>
@@ -4250,7 +3570,7 @@
       </p:sp>
       <p:sp>
         <p:nvSpPr>
-          <p:cNvPr id="16" name="사진 자리"/>
+          <p:cNvPr id="5" name="사진 자리"/>
           <p:cNvSpPr/>
           <p:nvPr/>
         </p:nvSpPr>
@@ -4298,7 +3618,7 @@
       </p:sp>
       <p:graphicFrame>
         <p:nvGraphicFramePr>
-          <p:cNvPr id="17" name="표"/>
+          <p:cNvPr id="6" name="표"/>
           <p:cNvGraphicFramePr>
             <a:graphicFrameLocks noGrp="1"/>
           </p:cNvGraphicFramePr>
@@ -4972,325 +4292,6 @@
       </p:sp>
       <p:sp>
         <p:nvSpPr>
-          <p:cNvPr id="5" name="장식"/>
-          <p:cNvSpPr/>
-          <p:nvPr/>
-        </p:nvSpPr>
-        <p:spPr>
-          <a:xfrm>
-            <a:off x="10914538" y="631759"/>
-            <a:ext cx="185261" cy="185261"/>
-          </a:xfrm>
-          <a:prstGeom prst="ellipse">
-            <a:avLst/>
-          </a:prstGeom>
-          <a:solidFill>
-            <a:srgbClr val="995229"/>
-          </a:solidFill>
-          <a:ln>
-            <a:noFill/>
-          </a:ln>
-        </p:spPr>
-        <p:txBody>
-          <a:bodyPr rtlCol="0" anchor="ctr"/>
-          <a:lstStyle/>
-          <a:p>
-            <a:pPr algn="ctr"/>
-          </a:p>
-        </p:txBody>
-      </p:sp>
-      <p:sp>
-        <p:nvSpPr>
-          <p:cNvPr id="6" name="장식"/>
-          <p:cNvSpPr/>
-          <p:nvPr/>
-        </p:nvSpPr>
-        <p:spPr>
-          <a:xfrm>
-            <a:off x="11491036" y="1099893"/>
-            <a:ext cx="111201" cy="111201"/>
-          </a:xfrm>
-          <a:prstGeom prst="ellipse">
-            <a:avLst/>
-          </a:prstGeom>
-          <a:solidFill>
-            <a:srgbClr val="F4DBCD"/>
-          </a:solidFill>
-          <a:ln>
-            <a:noFill/>
-          </a:ln>
-        </p:spPr>
-        <p:txBody>
-          <a:bodyPr rtlCol="0" anchor="ctr"/>
-          <a:lstStyle/>
-          <a:p>
-            <a:pPr algn="ctr"/>
-          </a:p>
-        </p:txBody>
-      </p:sp>
-      <p:sp>
-        <p:nvSpPr>
-          <p:cNvPr id="7" name="장식"/>
-          <p:cNvSpPr/>
-          <p:nvPr/>
-        </p:nvSpPr>
-        <p:spPr>
-          <a:xfrm>
-            <a:off x="10506607" y="843400"/>
-            <a:ext cx="146404" cy="146404"/>
-          </a:xfrm>
-          <a:prstGeom prst="ellipse">
-            <a:avLst/>
-          </a:prstGeom>
-          <a:solidFill>
-            <a:srgbClr val="3B9185"/>
-          </a:solidFill>
-          <a:ln>
-            <a:noFill/>
-          </a:ln>
-        </p:spPr>
-        <p:txBody>
-          <a:bodyPr rtlCol="0" anchor="ctr"/>
-          <a:lstStyle/>
-          <a:p>
-            <a:pPr algn="ctr"/>
-          </a:p>
-        </p:txBody>
-      </p:sp>
-      <p:sp>
-        <p:nvSpPr>
-          <p:cNvPr id="8" name="장식"/>
-          <p:cNvSpPr/>
-          <p:nvPr/>
-        </p:nvSpPr>
-        <p:spPr>
-          <a:xfrm>
-            <a:off x="11198146" y="619708"/>
-            <a:ext cx="120275" cy="120275"/>
-          </a:xfrm>
-          <a:prstGeom prst="ellipse">
-            <a:avLst/>
-          </a:prstGeom>
-          <a:solidFill>
-            <a:srgbClr val="995229"/>
-          </a:solidFill>
-          <a:ln>
-            <a:noFill/>
-          </a:ln>
-        </p:spPr>
-        <p:txBody>
-          <a:bodyPr rtlCol="0" anchor="ctr"/>
-          <a:lstStyle/>
-          <a:p>
-            <a:pPr algn="ctr"/>
-          </a:p>
-        </p:txBody>
-      </p:sp>
-      <p:sp>
-        <p:nvSpPr>
-          <p:cNvPr id="9" name="장식"/>
-          <p:cNvSpPr/>
-          <p:nvPr/>
-        </p:nvSpPr>
-        <p:spPr>
-          <a:xfrm>
-            <a:off x="11033527" y="398225"/>
-            <a:ext cx="186017" cy="186017"/>
-          </a:xfrm>
-          <a:prstGeom prst="ellipse">
-            <a:avLst/>
-          </a:prstGeom>
-          <a:solidFill>
-            <a:srgbClr val="F4DBCD"/>
-          </a:solidFill>
-          <a:ln>
-            <a:noFill/>
-          </a:ln>
-        </p:spPr>
-        <p:txBody>
-          <a:bodyPr rtlCol="0" anchor="ctr"/>
-          <a:lstStyle/>
-          <a:p>
-            <a:pPr algn="ctr"/>
-          </a:p>
-        </p:txBody>
-      </p:sp>
-      <p:sp>
-        <p:nvSpPr>
-          <p:cNvPr id="10" name="장식"/>
-          <p:cNvSpPr/>
-          <p:nvPr/>
-        </p:nvSpPr>
-        <p:spPr>
-          <a:xfrm>
-            <a:off x="10682891" y="656597"/>
-            <a:ext cx="79826" cy="79826"/>
-          </a:xfrm>
-          <a:prstGeom prst="ellipse">
-            <a:avLst/>
-          </a:prstGeom>
-          <a:solidFill>
-            <a:srgbClr val="3B9185"/>
-          </a:solidFill>
-          <a:ln>
-            <a:noFill/>
-          </a:ln>
-        </p:spPr>
-        <p:txBody>
-          <a:bodyPr rtlCol="0" anchor="ctr"/>
-          <a:lstStyle/>
-          <a:p>
-            <a:pPr algn="ctr"/>
-          </a:p>
-        </p:txBody>
-      </p:sp>
-      <p:sp>
-        <p:nvSpPr>
-          <p:cNvPr id="11" name="장식"/>
-          <p:cNvSpPr/>
-          <p:nvPr/>
-        </p:nvSpPr>
-        <p:spPr>
-          <a:xfrm>
-            <a:off x="11301345" y="1367190"/>
-            <a:ext cx="158557" cy="158557"/>
-          </a:xfrm>
-          <a:prstGeom prst="ellipse">
-            <a:avLst/>
-          </a:prstGeom>
-          <a:solidFill>
-            <a:srgbClr val="995229"/>
-          </a:solidFill>
-          <a:ln>
-            <a:noFill/>
-          </a:ln>
-        </p:spPr>
-        <p:txBody>
-          <a:bodyPr rtlCol="0" anchor="ctr"/>
-          <a:lstStyle/>
-          <a:p>
-            <a:pPr algn="ctr"/>
-          </a:p>
-        </p:txBody>
-      </p:sp>
-      <p:sp>
-        <p:nvSpPr>
-          <p:cNvPr id="12" name="장식"/>
-          <p:cNvSpPr/>
-          <p:nvPr/>
-        </p:nvSpPr>
-        <p:spPr>
-          <a:xfrm>
-            <a:off x="11059707" y="707976"/>
-            <a:ext cx="148776" cy="148776"/>
-          </a:xfrm>
-          <a:prstGeom prst="ellipse">
-            <a:avLst/>
-          </a:prstGeom>
-          <a:solidFill>
-            <a:srgbClr val="F4DBCD"/>
-          </a:solidFill>
-          <a:ln>
-            <a:noFill/>
-          </a:ln>
-        </p:spPr>
-        <p:txBody>
-          <a:bodyPr rtlCol="0" anchor="ctr"/>
-          <a:lstStyle/>
-          <a:p>
-            <a:pPr algn="ctr"/>
-          </a:p>
-        </p:txBody>
-      </p:sp>
-      <p:sp>
-        <p:nvSpPr>
-          <p:cNvPr id="13" name="장식"/>
-          <p:cNvSpPr/>
-          <p:nvPr/>
-        </p:nvSpPr>
-        <p:spPr>
-          <a:xfrm>
-            <a:off x="11352247" y="1000807"/>
-            <a:ext cx="157967" cy="157967"/>
-          </a:xfrm>
-          <a:prstGeom prst="ellipse">
-            <a:avLst/>
-          </a:prstGeom>
-          <a:solidFill>
-            <a:srgbClr val="3B9185"/>
-          </a:solidFill>
-          <a:ln>
-            <a:noFill/>
-          </a:ln>
-        </p:spPr>
-        <p:txBody>
-          <a:bodyPr rtlCol="0" anchor="ctr"/>
-          <a:lstStyle/>
-          <a:p>
-            <a:pPr algn="ctr"/>
-          </a:p>
-        </p:txBody>
-      </p:sp>
-      <p:sp>
-        <p:nvSpPr>
-          <p:cNvPr id="14" name="장식"/>
-          <p:cNvSpPr/>
-          <p:nvPr/>
-        </p:nvSpPr>
-        <p:spPr>
-          <a:xfrm>
-            <a:off x="10751978" y="615189"/>
-            <a:ext cx="100367" cy="100367"/>
-          </a:xfrm>
-          <a:prstGeom prst="ellipse">
-            <a:avLst/>
-          </a:prstGeom>
-          <a:solidFill>
-            <a:srgbClr val="995229"/>
-          </a:solidFill>
-          <a:ln>
-            <a:noFill/>
-          </a:ln>
-        </p:spPr>
-        <p:txBody>
-          <a:bodyPr rtlCol="0" anchor="ctr"/>
-          <a:lstStyle/>
-          <a:p>
-            <a:pPr algn="ctr"/>
-          </a:p>
-        </p:txBody>
-      </p:sp>
-      <p:sp>
-        <p:nvSpPr>
-          <p:cNvPr id="15" name="장식"/>
-          <p:cNvSpPr/>
-          <p:nvPr/>
-        </p:nvSpPr>
-        <p:spPr>
-          <a:xfrm>
-            <a:off x="10594948" y="721318"/>
-            <a:ext cx="69230" cy="69230"/>
-          </a:xfrm>
-          <a:prstGeom prst="ellipse">
-            <a:avLst/>
-          </a:prstGeom>
-          <a:solidFill>
-            <a:srgbClr val="F4DBCD"/>
-          </a:solidFill>
-          <a:ln>
-            <a:noFill/>
-          </a:ln>
-        </p:spPr>
-        <p:txBody>
-          <a:bodyPr rtlCol="0" anchor="ctr"/>
-          <a:lstStyle/>
-          <a:p>
-            <a:pPr algn="ctr"/>
-          </a:p>
-        </p:txBody>
-      </p:sp>
-      <p:sp>
-        <p:nvSpPr>
           <p:cNvPr id="2" name="Title 1"/>
           <p:cNvSpPr>
             <a:spLocks noGrp="1"/>
@@ -5329,7 +4330,7 @@
       </p:sp>
       <p:sp>
         <p:nvSpPr>
-          <p:cNvPr id="16" name="사진 자리"/>
+          <p:cNvPr id="5" name="사진 자리"/>
           <p:cNvSpPr/>
           <p:nvPr/>
         </p:nvSpPr>
@@ -5377,7 +4378,7 @@
       </p:sp>
       <p:sp>
         <p:nvSpPr>
-          <p:cNvPr id="17" name="사진 자리"/>
+          <p:cNvPr id="6" name="사진 자리"/>
           <p:cNvSpPr/>
           <p:nvPr/>
         </p:nvSpPr>
@@ -5509,325 +4510,6 @@
       </p:sp>
       <p:sp>
         <p:nvSpPr>
-          <p:cNvPr id="5" name="장식"/>
-          <p:cNvSpPr/>
-          <p:nvPr/>
-        </p:nvSpPr>
-        <p:spPr>
-          <a:xfrm>
-            <a:off x="10914538" y="631759"/>
-            <a:ext cx="185261" cy="185261"/>
-          </a:xfrm>
-          <a:prstGeom prst="ellipse">
-            <a:avLst/>
-          </a:prstGeom>
-          <a:solidFill>
-            <a:srgbClr val="995229"/>
-          </a:solidFill>
-          <a:ln>
-            <a:noFill/>
-          </a:ln>
-        </p:spPr>
-        <p:txBody>
-          <a:bodyPr rtlCol="0" anchor="ctr"/>
-          <a:lstStyle/>
-          <a:p>
-            <a:pPr algn="ctr"/>
-          </a:p>
-        </p:txBody>
-      </p:sp>
-      <p:sp>
-        <p:nvSpPr>
-          <p:cNvPr id="6" name="장식"/>
-          <p:cNvSpPr/>
-          <p:nvPr/>
-        </p:nvSpPr>
-        <p:spPr>
-          <a:xfrm>
-            <a:off x="11491036" y="1099893"/>
-            <a:ext cx="111201" cy="111201"/>
-          </a:xfrm>
-          <a:prstGeom prst="ellipse">
-            <a:avLst/>
-          </a:prstGeom>
-          <a:solidFill>
-            <a:srgbClr val="F4DBCD"/>
-          </a:solidFill>
-          <a:ln>
-            <a:noFill/>
-          </a:ln>
-        </p:spPr>
-        <p:txBody>
-          <a:bodyPr rtlCol="0" anchor="ctr"/>
-          <a:lstStyle/>
-          <a:p>
-            <a:pPr algn="ctr"/>
-          </a:p>
-        </p:txBody>
-      </p:sp>
-      <p:sp>
-        <p:nvSpPr>
-          <p:cNvPr id="7" name="장식"/>
-          <p:cNvSpPr/>
-          <p:nvPr/>
-        </p:nvSpPr>
-        <p:spPr>
-          <a:xfrm>
-            <a:off x="10506607" y="843400"/>
-            <a:ext cx="146404" cy="146404"/>
-          </a:xfrm>
-          <a:prstGeom prst="ellipse">
-            <a:avLst/>
-          </a:prstGeom>
-          <a:solidFill>
-            <a:srgbClr val="3B9185"/>
-          </a:solidFill>
-          <a:ln>
-            <a:noFill/>
-          </a:ln>
-        </p:spPr>
-        <p:txBody>
-          <a:bodyPr rtlCol="0" anchor="ctr"/>
-          <a:lstStyle/>
-          <a:p>
-            <a:pPr algn="ctr"/>
-          </a:p>
-        </p:txBody>
-      </p:sp>
-      <p:sp>
-        <p:nvSpPr>
-          <p:cNvPr id="8" name="장식"/>
-          <p:cNvSpPr/>
-          <p:nvPr/>
-        </p:nvSpPr>
-        <p:spPr>
-          <a:xfrm>
-            <a:off x="11198146" y="619708"/>
-            <a:ext cx="120275" cy="120275"/>
-          </a:xfrm>
-          <a:prstGeom prst="ellipse">
-            <a:avLst/>
-          </a:prstGeom>
-          <a:solidFill>
-            <a:srgbClr val="995229"/>
-          </a:solidFill>
-          <a:ln>
-            <a:noFill/>
-          </a:ln>
-        </p:spPr>
-        <p:txBody>
-          <a:bodyPr rtlCol="0" anchor="ctr"/>
-          <a:lstStyle/>
-          <a:p>
-            <a:pPr algn="ctr"/>
-          </a:p>
-        </p:txBody>
-      </p:sp>
-      <p:sp>
-        <p:nvSpPr>
-          <p:cNvPr id="9" name="장식"/>
-          <p:cNvSpPr/>
-          <p:nvPr/>
-        </p:nvSpPr>
-        <p:spPr>
-          <a:xfrm>
-            <a:off x="11033527" y="398225"/>
-            <a:ext cx="186017" cy="186017"/>
-          </a:xfrm>
-          <a:prstGeom prst="ellipse">
-            <a:avLst/>
-          </a:prstGeom>
-          <a:solidFill>
-            <a:srgbClr val="F4DBCD"/>
-          </a:solidFill>
-          <a:ln>
-            <a:noFill/>
-          </a:ln>
-        </p:spPr>
-        <p:txBody>
-          <a:bodyPr rtlCol="0" anchor="ctr"/>
-          <a:lstStyle/>
-          <a:p>
-            <a:pPr algn="ctr"/>
-          </a:p>
-        </p:txBody>
-      </p:sp>
-      <p:sp>
-        <p:nvSpPr>
-          <p:cNvPr id="10" name="장식"/>
-          <p:cNvSpPr/>
-          <p:nvPr/>
-        </p:nvSpPr>
-        <p:spPr>
-          <a:xfrm>
-            <a:off x="10682891" y="656597"/>
-            <a:ext cx="79826" cy="79826"/>
-          </a:xfrm>
-          <a:prstGeom prst="ellipse">
-            <a:avLst/>
-          </a:prstGeom>
-          <a:solidFill>
-            <a:srgbClr val="3B9185"/>
-          </a:solidFill>
-          <a:ln>
-            <a:noFill/>
-          </a:ln>
-        </p:spPr>
-        <p:txBody>
-          <a:bodyPr rtlCol="0" anchor="ctr"/>
-          <a:lstStyle/>
-          <a:p>
-            <a:pPr algn="ctr"/>
-          </a:p>
-        </p:txBody>
-      </p:sp>
-      <p:sp>
-        <p:nvSpPr>
-          <p:cNvPr id="11" name="장식"/>
-          <p:cNvSpPr/>
-          <p:nvPr/>
-        </p:nvSpPr>
-        <p:spPr>
-          <a:xfrm>
-            <a:off x="11301345" y="1367190"/>
-            <a:ext cx="158557" cy="158557"/>
-          </a:xfrm>
-          <a:prstGeom prst="ellipse">
-            <a:avLst/>
-          </a:prstGeom>
-          <a:solidFill>
-            <a:srgbClr val="995229"/>
-          </a:solidFill>
-          <a:ln>
-            <a:noFill/>
-          </a:ln>
-        </p:spPr>
-        <p:txBody>
-          <a:bodyPr rtlCol="0" anchor="ctr"/>
-          <a:lstStyle/>
-          <a:p>
-            <a:pPr algn="ctr"/>
-          </a:p>
-        </p:txBody>
-      </p:sp>
-      <p:sp>
-        <p:nvSpPr>
-          <p:cNvPr id="12" name="장식"/>
-          <p:cNvSpPr/>
-          <p:nvPr/>
-        </p:nvSpPr>
-        <p:spPr>
-          <a:xfrm>
-            <a:off x="11059707" y="707976"/>
-            <a:ext cx="148776" cy="148776"/>
-          </a:xfrm>
-          <a:prstGeom prst="ellipse">
-            <a:avLst/>
-          </a:prstGeom>
-          <a:solidFill>
-            <a:srgbClr val="F4DBCD"/>
-          </a:solidFill>
-          <a:ln>
-            <a:noFill/>
-          </a:ln>
-        </p:spPr>
-        <p:txBody>
-          <a:bodyPr rtlCol="0" anchor="ctr"/>
-          <a:lstStyle/>
-          <a:p>
-            <a:pPr algn="ctr"/>
-          </a:p>
-        </p:txBody>
-      </p:sp>
-      <p:sp>
-        <p:nvSpPr>
-          <p:cNvPr id="13" name="장식"/>
-          <p:cNvSpPr/>
-          <p:nvPr/>
-        </p:nvSpPr>
-        <p:spPr>
-          <a:xfrm>
-            <a:off x="11352247" y="1000807"/>
-            <a:ext cx="157967" cy="157967"/>
-          </a:xfrm>
-          <a:prstGeom prst="ellipse">
-            <a:avLst/>
-          </a:prstGeom>
-          <a:solidFill>
-            <a:srgbClr val="3B9185"/>
-          </a:solidFill>
-          <a:ln>
-            <a:noFill/>
-          </a:ln>
-        </p:spPr>
-        <p:txBody>
-          <a:bodyPr rtlCol="0" anchor="ctr"/>
-          <a:lstStyle/>
-          <a:p>
-            <a:pPr algn="ctr"/>
-          </a:p>
-        </p:txBody>
-      </p:sp>
-      <p:sp>
-        <p:nvSpPr>
-          <p:cNvPr id="14" name="장식"/>
-          <p:cNvSpPr/>
-          <p:nvPr/>
-        </p:nvSpPr>
-        <p:spPr>
-          <a:xfrm>
-            <a:off x="10751978" y="615189"/>
-            <a:ext cx="100367" cy="100367"/>
-          </a:xfrm>
-          <a:prstGeom prst="ellipse">
-            <a:avLst/>
-          </a:prstGeom>
-          <a:solidFill>
-            <a:srgbClr val="995229"/>
-          </a:solidFill>
-          <a:ln>
-            <a:noFill/>
-          </a:ln>
-        </p:spPr>
-        <p:txBody>
-          <a:bodyPr rtlCol="0" anchor="ctr"/>
-          <a:lstStyle/>
-          <a:p>
-            <a:pPr algn="ctr"/>
-          </a:p>
-        </p:txBody>
-      </p:sp>
-      <p:sp>
-        <p:nvSpPr>
-          <p:cNvPr id="15" name="장식"/>
-          <p:cNvSpPr/>
-          <p:nvPr/>
-        </p:nvSpPr>
-        <p:spPr>
-          <a:xfrm>
-            <a:off x="10594948" y="721318"/>
-            <a:ext cx="69230" cy="69230"/>
-          </a:xfrm>
-          <a:prstGeom prst="ellipse">
-            <a:avLst/>
-          </a:prstGeom>
-          <a:solidFill>
-            <a:srgbClr val="F4DBCD"/>
-          </a:solidFill>
-          <a:ln>
-            <a:noFill/>
-          </a:ln>
-        </p:spPr>
-        <p:txBody>
-          <a:bodyPr rtlCol="0" anchor="ctr"/>
-          <a:lstStyle/>
-          <a:p>
-            <a:pPr algn="ctr"/>
-          </a:p>
-        </p:txBody>
-      </p:sp>
-      <p:sp>
-        <p:nvSpPr>
           <p:cNvPr id="2" name="Title 1"/>
           <p:cNvSpPr>
             <a:spLocks noGrp="1"/>
@@ -5866,7 +4548,7 @@
       </p:sp>
       <p:sp>
         <p:nvSpPr>
-          <p:cNvPr id="16" name="사진 자리"/>
+          <p:cNvPr id="5" name="사진 자리"/>
           <p:cNvSpPr/>
           <p:nvPr/>
         </p:nvSpPr>
@@ -5914,7 +4596,7 @@
       </p:sp>
       <p:sp>
         <p:nvSpPr>
-          <p:cNvPr id="17" name="사진 자리"/>
+          <p:cNvPr id="6" name="사진 자리"/>
           <p:cNvSpPr/>
           <p:nvPr/>
         </p:nvSpPr>
@@ -5962,7 +4644,7 @@
       </p:sp>
       <p:sp>
         <p:nvSpPr>
-          <p:cNvPr id="18" name="사진 자리"/>
+          <p:cNvPr id="7" name="사진 자리"/>
           <p:cNvSpPr/>
           <p:nvPr/>
         </p:nvSpPr>
@@ -6010,7 +4692,7 @@
       </p:sp>
       <p:sp>
         <p:nvSpPr>
-          <p:cNvPr id="19" name="사진 자리"/>
+          <p:cNvPr id="8" name="사진 자리"/>
           <p:cNvSpPr/>
           <p:nvPr/>
         </p:nvSpPr>
@@ -6058,7 +4740,7 @@
       </p:sp>
       <p:sp>
         <p:nvSpPr>
-          <p:cNvPr id="20" name="사진 자리"/>
+          <p:cNvPr id="9" name="사진 자리"/>
           <p:cNvSpPr/>
           <p:nvPr/>
         </p:nvSpPr>
@@ -6106,7 +4788,7 @@
       </p:sp>
       <p:sp>
         <p:nvSpPr>
-          <p:cNvPr id="21" name="사진 자리"/>
+          <p:cNvPr id="10" name="사진 자리"/>
           <p:cNvSpPr/>
           <p:nvPr/>
         </p:nvSpPr>
@@ -6238,325 +4920,6 @@
       </p:sp>
       <p:sp>
         <p:nvSpPr>
-          <p:cNvPr id="5" name="장식"/>
-          <p:cNvSpPr/>
-          <p:nvPr/>
-        </p:nvSpPr>
-        <p:spPr>
-          <a:xfrm>
-            <a:off x="10914538" y="631759"/>
-            <a:ext cx="185261" cy="185261"/>
-          </a:xfrm>
-          <a:prstGeom prst="ellipse">
-            <a:avLst/>
-          </a:prstGeom>
-          <a:solidFill>
-            <a:srgbClr val="995229"/>
-          </a:solidFill>
-          <a:ln>
-            <a:noFill/>
-          </a:ln>
-        </p:spPr>
-        <p:txBody>
-          <a:bodyPr rtlCol="0" anchor="ctr"/>
-          <a:lstStyle/>
-          <a:p>
-            <a:pPr algn="ctr"/>
-          </a:p>
-        </p:txBody>
-      </p:sp>
-      <p:sp>
-        <p:nvSpPr>
-          <p:cNvPr id="6" name="장식"/>
-          <p:cNvSpPr/>
-          <p:nvPr/>
-        </p:nvSpPr>
-        <p:spPr>
-          <a:xfrm>
-            <a:off x="11491036" y="1099893"/>
-            <a:ext cx="111201" cy="111201"/>
-          </a:xfrm>
-          <a:prstGeom prst="ellipse">
-            <a:avLst/>
-          </a:prstGeom>
-          <a:solidFill>
-            <a:srgbClr val="F4DBCD"/>
-          </a:solidFill>
-          <a:ln>
-            <a:noFill/>
-          </a:ln>
-        </p:spPr>
-        <p:txBody>
-          <a:bodyPr rtlCol="0" anchor="ctr"/>
-          <a:lstStyle/>
-          <a:p>
-            <a:pPr algn="ctr"/>
-          </a:p>
-        </p:txBody>
-      </p:sp>
-      <p:sp>
-        <p:nvSpPr>
-          <p:cNvPr id="7" name="장식"/>
-          <p:cNvSpPr/>
-          <p:nvPr/>
-        </p:nvSpPr>
-        <p:spPr>
-          <a:xfrm>
-            <a:off x="10506607" y="843400"/>
-            <a:ext cx="146404" cy="146404"/>
-          </a:xfrm>
-          <a:prstGeom prst="ellipse">
-            <a:avLst/>
-          </a:prstGeom>
-          <a:solidFill>
-            <a:srgbClr val="3B9185"/>
-          </a:solidFill>
-          <a:ln>
-            <a:noFill/>
-          </a:ln>
-        </p:spPr>
-        <p:txBody>
-          <a:bodyPr rtlCol="0" anchor="ctr"/>
-          <a:lstStyle/>
-          <a:p>
-            <a:pPr algn="ctr"/>
-          </a:p>
-        </p:txBody>
-      </p:sp>
-      <p:sp>
-        <p:nvSpPr>
-          <p:cNvPr id="8" name="장식"/>
-          <p:cNvSpPr/>
-          <p:nvPr/>
-        </p:nvSpPr>
-        <p:spPr>
-          <a:xfrm>
-            <a:off x="11198146" y="619708"/>
-            <a:ext cx="120275" cy="120275"/>
-          </a:xfrm>
-          <a:prstGeom prst="ellipse">
-            <a:avLst/>
-          </a:prstGeom>
-          <a:solidFill>
-            <a:srgbClr val="995229"/>
-          </a:solidFill>
-          <a:ln>
-            <a:noFill/>
-          </a:ln>
-        </p:spPr>
-        <p:txBody>
-          <a:bodyPr rtlCol="0" anchor="ctr"/>
-          <a:lstStyle/>
-          <a:p>
-            <a:pPr algn="ctr"/>
-          </a:p>
-        </p:txBody>
-      </p:sp>
-      <p:sp>
-        <p:nvSpPr>
-          <p:cNvPr id="9" name="장식"/>
-          <p:cNvSpPr/>
-          <p:nvPr/>
-        </p:nvSpPr>
-        <p:spPr>
-          <a:xfrm>
-            <a:off x="11033527" y="398225"/>
-            <a:ext cx="186017" cy="186017"/>
-          </a:xfrm>
-          <a:prstGeom prst="ellipse">
-            <a:avLst/>
-          </a:prstGeom>
-          <a:solidFill>
-            <a:srgbClr val="F4DBCD"/>
-          </a:solidFill>
-          <a:ln>
-            <a:noFill/>
-          </a:ln>
-        </p:spPr>
-        <p:txBody>
-          <a:bodyPr rtlCol="0" anchor="ctr"/>
-          <a:lstStyle/>
-          <a:p>
-            <a:pPr algn="ctr"/>
-          </a:p>
-        </p:txBody>
-      </p:sp>
-      <p:sp>
-        <p:nvSpPr>
-          <p:cNvPr id="10" name="장식"/>
-          <p:cNvSpPr/>
-          <p:nvPr/>
-        </p:nvSpPr>
-        <p:spPr>
-          <a:xfrm>
-            <a:off x="10682891" y="656597"/>
-            <a:ext cx="79826" cy="79826"/>
-          </a:xfrm>
-          <a:prstGeom prst="ellipse">
-            <a:avLst/>
-          </a:prstGeom>
-          <a:solidFill>
-            <a:srgbClr val="3B9185"/>
-          </a:solidFill>
-          <a:ln>
-            <a:noFill/>
-          </a:ln>
-        </p:spPr>
-        <p:txBody>
-          <a:bodyPr rtlCol="0" anchor="ctr"/>
-          <a:lstStyle/>
-          <a:p>
-            <a:pPr algn="ctr"/>
-          </a:p>
-        </p:txBody>
-      </p:sp>
-      <p:sp>
-        <p:nvSpPr>
-          <p:cNvPr id="11" name="장식"/>
-          <p:cNvSpPr/>
-          <p:nvPr/>
-        </p:nvSpPr>
-        <p:spPr>
-          <a:xfrm>
-            <a:off x="11301345" y="1367190"/>
-            <a:ext cx="158557" cy="158557"/>
-          </a:xfrm>
-          <a:prstGeom prst="ellipse">
-            <a:avLst/>
-          </a:prstGeom>
-          <a:solidFill>
-            <a:srgbClr val="995229"/>
-          </a:solidFill>
-          <a:ln>
-            <a:noFill/>
-          </a:ln>
-        </p:spPr>
-        <p:txBody>
-          <a:bodyPr rtlCol="0" anchor="ctr"/>
-          <a:lstStyle/>
-          <a:p>
-            <a:pPr algn="ctr"/>
-          </a:p>
-        </p:txBody>
-      </p:sp>
-      <p:sp>
-        <p:nvSpPr>
-          <p:cNvPr id="12" name="장식"/>
-          <p:cNvSpPr/>
-          <p:nvPr/>
-        </p:nvSpPr>
-        <p:spPr>
-          <a:xfrm>
-            <a:off x="11059707" y="707976"/>
-            <a:ext cx="148776" cy="148776"/>
-          </a:xfrm>
-          <a:prstGeom prst="ellipse">
-            <a:avLst/>
-          </a:prstGeom>
-          <a:solidFill>
-            <a:srgbClr val="F4DBCD"/>
-          </a:solidFill>
-          <a:ln>
-            <a:noFill/>
-          </a:ln>
-        </p:spPr>
-        <p:txBody>
-          <a:bodyPr rtlCol="0" anchor="ctr"/>
-          <a:lstStyle/>
-          <a:p>
-            <a:pPr algn="ctr"/>
-          </a:p>
-        </p:txBody>
-      </p:sp>
-      <p:sp>
-        <p:nvSpPr>
-          <p:cNvPr id="13" name="장식"/>
-          <p:cNvSpPr/>
-          <p:nvPr/>
-        </p:nvSpPr>
-        <p:spPr>
-          <a:xfrm>
-            <a:off x="11352247" y="1000807"/>
-            <a:ext cx="157967" cy="157967"/>
-          </a:xfrm>
-          <a:prstGeom prst="ellipse">
-            <a:avLst/>
-          </a:prstGeom>
-          <a:solidFill>
-            <a:srgbClr val="3B9185"/>
-          </a:solidFill>
-          <a:ln>
-            <a:noFill/>
-          </a:ln>
-        </p:spPr>
-        <p:txBody>
-          <a:bodyPr rtlCol="0" anchor="ctr"/>
-          <a:lstStyle/>
-          <a:p>
-            <a:pPr algn="ctr"/>
-          </a:p>
-        </p:txBody>
-      </p:sp>
-      <p:sp>
-        <p:nvSpPr>
-          <p:cNvPr id="14" name="장식"/>
-          <p:cNvSpPr/>
-          <p:nvPr/>
-        </p:nvSpPr>
-        <p:spPr>
-          <a:xfrm>
-            <a:off x="10751978" y="615189"/>
-            <a:ext cx="100367" cy="100367"/>
-          </a:xfrm>
-          <a:prstGeom prst="ellipse">
-            <a:avLst/>
-          </a:prstGeom>
-          <a:solidFill>
-            <a:srgbClr val="995229"/>
-          </a:solidFill>
-          <a:ln>
-            <a:noFill/>
-          </a:ln>
-        </p:spPr>
-        <p:txBody>
-          <a:bodyPr rtlCol="0" anchor="ctr"/>
-          <a:lstStyle/>
-          <a:p>
-            <a:pPr algn="ctr"/>
-          </a:p>
-        </p:txBody>
-      </p:sp>
-      <p:sp>
-        <p:nvSpPr>
-          <p:cNvPr id="15" name="장식"/>
-          <p:cNvSpPr/>
-          <p:nvPr/>
-        </p:nvSpPr>
-        <p:spPr>
-          <a:xfrm>
-            <a:off x="10594948" y="721318"/>
-            <a:ext cx="69230" cy="69230"/>
-          </a:xfrm>
-          <a:prstGeom prst="ellipse">
-            <a:avLst/>
-          </a:prstGeom>
-          <a:solidFill>
-            <a:srgbClr val="F4DBCD"/>
-          </a:solidFill>
-          <a:ln>
-            <a:noFill/>
-          </a:ln>
-        </p:spPr>
-        <p:txBody>
-          <a:bodyPr rtlCol="0" anchor="ctr"/>
-          <a:lstStyle/>
-          <a:p>
-            <a:pPr algn="ctr"/>
-          </a:p>
-        </p:txBody>
-      </p:sp>
-      <p:sp>
-        <p:nvSpPr>
           <p:cNvPr id="2" name="Title 1"/>
           <p:cNvSpPr>
             <a:spLocks noGrp="1"/>
@@ -6595,7 +4958,7 @@
       </p:sp>
       <p:sp>
         <p:nvSpPr>
-          <p:cNvPr id="16" name="사진 자리"/>
+          <p:cNvPr id="5" name="사진 자리"/>
           <p:cNvSpPr/>
           <p:nvPr/>
         </p:nvSpPr>
@@ -6643,7 +5006,7 @@
       </p:sp>
       <p:sp>
         <p:nvSpPr>
-          <p:cNvPr id="17" name="사진 자리"/>
+          <p:cNvPr id="6" name="사진 자리"/>
           <p:cNvSpPr/>
           <p:nvPr/>
         </p:nvSpPr>
@@ -6691,7 +5054,7 @@
       </p:sp>
       <p:sp>
         <p:nvSpPr>
-          <p:cNvPr id="18" name="사진 자리"/>
+          <p:cNvPr id="7" name="사진 자리"/>
           <p:cNvSpPr/>
           <p:nvPr/>
         </p:nvSpPr>
@@ -6739,7 +5102,7 @@
       </p:sp>
       <p:sp>
         <p:nvSpPr>
-          <p:cNvPr id="19" name="사진 자리"/>
+          <p:cNvPr id="8" name="사진 자리"/>
           <p:cNvSpPr/>
           <p:nvPr/>
         </p:nvSpPr>
@@ -6787,7 +5150,7 @@
       </p:sp>
       <p:sp>
         <p:nvSpPr>
-          <p:cNvPr id="20" name="사진 자리"/>
+          <p:cNvPr id="9" name="사진 자리"/>
           <p:cNvSpPr/>
           <p:nvPr/>
         </p:nvSpPr>
@@ -6835,7 +5198,7 @@
       </p:sp>
       <p:sp>
         <p:nvSpPr>
-          <p:cNvPr id="21" name="사진 자리"/>
+          <p:cNvPr id="10" name="사진 자리"/>
           <p:cNvSpPr/>
           <p:nvPr/>
         </p:nvSpPr>
@@ -6883,7 +5246,7 @@
       </p:sp>
       <p:sp>
         <p:nvSpPr>
-          <p:cNvPr id="22" name="사진 자리"/>
+          <p:cNvPr id="11" name="사진 자리"/>
           <p:cNvSpPr/>
           <p:nvPr/>
         </p:nvSpPr>
@@ -6931,7 +5294,7 @@
       </p:sp>
       <p:sp>
         <p:nvSpPr>
-          <p:cNvPr id="23" name="사진 자리"/>
+          <p:cNvPr id="12" name="사진 자리"/>
           <p:cNvSpPr/>
           <p:nvPr/>
         </p:nvSpPr>
@@ -6988,14 +5351,6 @@
 <file path=ppt/slides/slide6.xml><?xml version="1.0" encoding="utf-8"?>
 <p:sld xmlns:a="http://schemas.openxmlformats.org/drawingml/2006/main" xmlns:p="http://schemas.openxmlformats.org/presentationml/2006/main" xmlns:r="http://schemas.openxmlformats.org/officeDocument/2006/relationships">
   <p:cSld>
-    <p:bg>
-      <p:bgPr>
-        <a:solidFill>
-          <a:srgbClr val="FBF3EF"/>
-        </a:solidFill>
-        <a:effectLst/>
-      </p:bgPr>
-    </p:bg>
     <p:spTree>
       <p:nvGrpSpPr>
         <p:cNvPr id="1" name=""/>
@@ -7003,383 +5358,30 @@
         <p:nvPr/>
       </p:nvGrpSpPr>
       <p:grpSpPr/>
-      <p:sp>
-        <p:nvSpPr>
-          <p:cNvPr id="3" name="장식"/>
-          <p:cNvSpPr/>
+      <p:pic>
+        <p:nvPicPr>
+          <p:cNvPr id="3" name="표지 그림" descr="birthday-38.jpg"/>
+          <p:cNvPicPr>
+            <a:picLocks noChangeAspect="1"/>
+          </p:cNvPicPr>
           <p:nvPr/>
-        </p:nvSpPr>
-        <p:spPr>
-          <a:xfrm>
-            <a:off x="274320" y="274320"/>
-            <a:ext cx="11643055" cy="6309360"/>
+        </p:nvPicPr>
+        <p:blipFill>
+          <a:blip r:embed="rId2"/>
+          <a:stretch>
+            <a:fillRect/>
+          </a:stretch>
+        </p:blipFill>
+        <p:spPr>
+          <a:xfrm>
+            <a:off x="0" y="0"/>
+            <a:ext cx="12191695" cy="6858000"/>
           </a:xfrm>
           <a:prstGeom prst="rect">
             <a:avLst/>
           </a:prstGeom>
-          <a:noFill/>
-          <a:ln w="38100">
-            <a:solidFill>
-              <a:srgbClr val="995229"/>
-            </a:solidFill>
-          </a:ln>
-        </p:spPr>
-        <p:txBody>
-          <a:bodyPr rtlCol="0" anchor="ctr"/>
-          <a:lstStyle/>
-          <a:p>
-            <a:pPr algn="ctr"/>
-          </a:p>
-        </p:txBody>
-      </p:sp>
-      <p:sp>
-        <p:nvSpPr>
-          <p:cNvPr id="4" name="장식"/>
-          <p:cNvSpPr/>
-          <p:nvPr/>
-        </p:nvSpPr>
-        <p:spPr>
-          <a:xfrm>
-            <a:off x="457200" y="457200"/>
-            <a:ext cx="11277295" cy="5943600"/>
-          </a:xfrm>
-          <a:prstGeom prst="rect">
-            <a:avLst/>
-          </a:prstGeom>
-          <a:noFill/>
-          <a:ln w="12700">
-            <a:solidFill>
-              <a:srgbClr val="F4DBCD"/>
-            </a:solidFill>
-          </a:ln>
-        </p:spPr>
-        <p:txBody>
-          <a:bodyPr rtlCol="0" anchor="ctr"/>
-          <a:lstStyle/>
-          <a:p>
-            <a:pPr algn="ctr"/>
-          </a:p>
-        </p:txBody>
-      </p:sp>
-      <p:sp>
-        <p:nvSpPr>
-          <p:cNvPr id="5" name="장식"/>
-          <p:cNvSpPr/>
-          <p:nvPr/>
-        </p:nvSpPr>
-        <p:spPr>
-          <a:xfrm>
-            <a:off x="5854364" y="780551"/>
-            <a:ext cx="333470" cy="333470"/>
-          </a:xfrm>
-          <a:prstGeom prst="ellipse">
-            <a:avLst/>
-          </a:prstGeom>
-          <a:solidFill>
-            <a:srgbClr val="995229"/>
-          </a:solidFill>
-          <a:ln>
-            <a:noFill/>
-          </a:ln>
-        </p:spPr>
-        <p:txBody>
-          <a:bodyPr rtlCol="0" anchor="ctr"/>
-          <a:lstStyle/>
-          <a:p>
-            <a:pPr algn="ctr"/>
-          </a:p>
-        </p:txBody>
-      </p:sp>
-      <p:sp>
-        <p:nvSpPr>
-          <p:cNvPr id="6" name="장식"/>
-          <p:cNvSpPr/>
-          <p:nvPr/>
-        </p:nvSpPr>
-        <p:spPr>
-          <a:xfrm>
-            <a:off x="6892061" y="1623191"/>
-            <a:ext cx="200163" cy="200163"/>
-          </a:xfrm>
-          <a:prstGeom prst="ellipse">
-            <a:avLst/>
-          </a:prstGeom>
-          <a:solidFill>
-            <a:srgbClr val="F4DBCD"/>
-          </a:solidFill>
-          <a:ln>
-            <a:noFill/>
-          </a:ln>
-        </p:spPr>
-        <p:txBody>
-          <a:bodyPr rtlCol="0" anchor="ctr"/>
-          <a:lstStyle/>
-          <a:p>
-            <a:pPr algn="ctr"/>
-          </a:p>
-        </p:txBody>
-      </p:sp>
-      <p:sp>
-        <p:nvSpPr>
-          <p:cNvPr id="7" name="장식"/>
-          <p:cNvSpPr/>
-          <p:nvPr/>
-        </p:nvSpPr>
-        <p:spPr>
-          <a:xfrm>
-            <a:off x="5120089" y="1161505"/>
-            <a:ext cx="263527" cy="263527"/>
-          </a:xfrm>
-          <a:prstGeom prst="ellipse">
-            <a:avLst/>
-          </a:prstGeom>
-          <a:solidFill>
-            <a:srgbClr val="3B9185"/>
-          </a:solidFill>
-          <a:ln>
-            <a:noFill/>
-          </a:ln>
-        </p:spPr>
-        <p:txBody>
-          <a:bodyPr rtlCol="0" anchor="ctr"/>
-          <a:lstStyle/>
-          <a:p>
-            <a:pPr algn="ctr"/>
-          </a:p>
-        </p:txBody>
-      </p:sp>
-      <p:sp>
-        <p:nvSpPr>
-          <p:cNvPr id="8" name="장식"/>
-          <p:cNvSpPr/>
-          <p:nvPr/>
-        </p:nvSpPr>
-        <p:spPr>
-          <a:xfrm>
-            <a:off x="6364859" y="758859"/>
-            <a:ext cx="216496" cy="216496"/>
-          </a:xfrm>
-          <a:prstGeom prst="ellipse">
-            <a:avLst/>
-          </a:prstGeom>
-          <a:solidFill>
-            <a:srgbClr val="995229"/>
-          </a:solidFill>
-          <a:ln>
-            <a:noFill/>
-          </a:ln>
-        </p:spPr>
-        <p:txBody>
-          <a:bodyPr rtlCol="0" anchor="ctr"/>
-          <a:lstStyle/>
-          <a:p>
-            <a:pPr algn="ctr"/>
-          </a:p>
-        </p:txBody>
-      </p:sp>
-      <p:sp>
-        <p:nvSpPr>
-          <p:cNvPr id="9" name="장식"/>
-          <p:cNvSpPr/>
-          <p:nvPr/>
-        </p:nvSpPr>
-        <p:spPr>
-          <a:xfrm>
-            <a:off x="6068545" y="360190"/>
-            <a:ext cx="334832" cy="334832"/>
-          </a:xfrm>
-          <a:prstGeom prst="ellipse">
-            <a:avLst/>
-          </a:prstGeom>
-          <a:solidFill>
-            <a:srgbClr val="F4DBCD"/>
-          </a:solidFill>
-          <a:ln>
-            <a:noFill/>
-          </a:ln>
-        </p:spPr>
-        <p:txBody>
-          <a:bodyPr rtlCol="0" anchor="ctr"/>
-          <a:lstStyle/>
-          <a:p>
-            <a:pPr algn="ctr"/>
-          </a:p>
-        </p:txBody>
-      </p:sp>
-      <p:sp>
-        <p:nvSpPr>
-          <p:cNvPr id="10" name="장식"/>
-          <p:cNvSpPr/>
-          <p:nvPr/>
-        </p:nvSpPr>
-        <p:spPr>
-          <a:xfrm>
-            <a:off x="5437401" y="825259"/>
-            <a:ext cx="143688" cy="143688"/>
-          </a:xfrm>
-          <a:prstGeom prst="ellipse">
-            <a:avLst/>
-          </a:prstGeom>
-          <a:solidFill>
-            <a:srgbClr val="3B9185"/>
-          </a:solidFill>
-          <a:ln>
-            <a:noFill/>
-          </a:ln>
-        </p:spPr>
-        <p:txBody>
-          <a:bodyPr rtlCol="0" anchor="ctr"/>
-          <a:lstStyle/>
-          <a:p>
-            <a:pPr algn="ctr"/>
-          </a:p>
-        </p:txBody>
-      </p:sp>
-      <p:sp>
-        <p:nvSpPr>
-          <p:cNvPr id="11" name="장식"/>
-          <p:cNvSpPr/>
-          <p:nvPr/>
-        </p:nvSpPr>
-        <p:spPr>
-          <a:xfrm>
-            <a:off x="6550618" y="2104327"/>
-            <a:ext cx="285402" cy="285402"/>
-          </a:xfrm>
-          <a:prstGeom prst="ellipse">
-            <a:avLst/>
-          </a:prstGeom>
-          <a:solidFill>
-            <a:srgbClr val="995229"/>
-          </a:solidFill>
-          <a:ln>
-            <a:noFill/>
-          </a:ln>
-        </p:spPr>
-        <p:txBody>
-          <a:bodyPr rtlCol="0" anchor="ctr"/>
-          <a:lstStyle/>
-          <a:p>
-            <a:pPr algn="ctr"/>
-          </a:p>
-        </p:txBody>
-      </p:sp>
-      <p:sp>
-        <p:nvSpPr>
-          <p:cNvPr id="12" name="장식"/>
-          <p:cNvSpPr/>
-          <p:nvPr/>
-        </p:nvSpPr>
-        <p:spPr>
-          <a:xfrm>
-            <a:off x="6115670" y="917740"/>
-            <a:ext cx="267797" cy="267797"/>
-          </a:xfrm>
-          <a:prstGeom prst="ellipse">
-            <a:avLst/>
-          </a:prstGeom>
-          <a:solidFill>
-            <a:srgbClr val="F4DBCD"/>
-          </a:solidFill>
-          <a:ln>
-            <a:noFill/>
-          </a:ln>
-        </p:spPr>
-        <p:txBody>
-          <a:bodyPr rtlCol="0" anchor="ctr"/>
-          <a:lstStyle/>
-          <a:p>
-            <a:pPr algn="ctr"/>
-          </a:p>
-        </p:txBody>
-      </p:sp>
-      <p:sp>
-        <p:nvSpPr>
-          <p:cNvPr id="13" name="장식"/>
-          <p:cNvSpPr/>
-          <p:nvPr/>
-        </p:nvSpPr>
-        <p:spPr>
-          <a:xfrm>
-            <a:off x="6642241" y="1444838"/>
-            <a:ext cx="284342" cy="284342"/>
-          </a:xfrm>
-          <a:prstGeom prst="ellipse">
-            <a:avLst/>
-          </a:prstGeom>
-          <a:solidFill>
-            <a:srgbClr val="3B9185"/>
-          </a:solidFill>
-          <a:ln>
-            <a:noFill/>
-          </a:ln>
-        </p:spPr>
-        <p:txBody>
-          <a:bodyPr rtlCol="0" anchor="ctr"/>
-          <a:lstStyle/>
-          <a:p>
-            <a:pPr algn="ctr"/>
-          </a:p>
-        </p:txBody>
-      </p:sp>
-      <p:sp>
-        <p:nvSpPr>
-          <p:cNvPr id="14" name="장식"/>
-          <p:cNvSpPr/>
-          <p:nvPr/>
-        </p:nvSpPr>
-        <p:spPr>
-          <a:xfrm>
-            <a:off x="5561757" y="750724"/>
-            <a:ext cx="180660" cy="180660"/>
-          </a:xfrm>
-          <a:prstGeom prst="ellipse">
-            <a:avLst/>
-          </a:prstGeom>
-          <a:solidFill>
-            <a:srgbClr val="995229"/>
-          </a:solidFill>
-          <a:ln>
-            <a:noFill/>
-          </a:ln>
-        </p:spPr>
-        <p:txBody>
-          <a:bodyPr rtlCol="0" anchor="ctr"/>
-          <a:lstStyle/>
-          <a:p>
-            <a:pPr algn="ctr"/>
-          </a:p>
-        </p:txBody>
-      </p:sp>
-      <p:sp>
-        <p:nvSpPr>
-          <p:cNvPr id="15" name="장식"/>
-          <p:cNvSpPr/>
-          <p:nvPr/>
-        </p:nvSpPr>
-        <p:spPr>
-          <a:xfrm>
-            <a:off x="5279103" y="941758"/>
-            <a:ext cx="124614" cy="124614"/>
-          </a:xfrm>
-          <a:prstGeom prst="ellipse">
-            <a:avLst/>
-          </a:prstGeom>
-          <a:solidFill>
-            <a:srgbClr val="F4DBCD"/>
-          </a:solidFill>
-          <a:ln>
-            <a:noFill/>
-          </a:ln>
-        </p:spPr>
-        <p:txBody>
-          <a:bodyPr rtlCol="0" anchor="ctr"/>
-          <a:lstStyle/>
-          <a:p>
-            <a:pPr algn="ctr"/>
-          </a:p>
-        </p:txBody>
-      </p:sp>
+        </p:spPr>
+      </p:pic>
       <p:sp>
         <p:nvSpPr>
           <p:cNvPr id="2" name="Title 1"/>
@@ -7392,8 +5394,8 @@
         </p:nvSpPr>
         <p:spPr>
           <a:xfrm>
-            <a:off x="1463003" y="2331720"/>
-            <a:ext cx="9265688" cy="1371600"/>
+            <a:off x="853418" y="2057400"/>
+            <a:ext cx="6095847" cy="1554480"/>
           </a:xfrm>
         </p:spPr>
         <p:txBody>
@@ -7402,7 +5404,7 @@
           </a:bodyPr>
           <a:lstStyle/>
           <a:p>
-            <a:pPr algn="ctr">
+            <a:pPr algn="l">
               <a:lnSpc>
                 <a:spcPct val="105000"/>
               </a:lnSpc>
@@ -7413,21 +5415,21 @@
                   <a:srgbClr val="492713"/>
                 </a:solidFill>
               </a:rPr>
-              <a:t>함께해 주셔서 감사합니다</a:t>
-            </a:r>
-          </a:p>
-        </p:txBody>
-      </p:sp>
-      <p:sp>
-        <p:nvSpPr>
-          <p:cNvPr id="16" name="한 줄 문구"/>
+              <a:t>와 주셔서 고맙습니다</a:t>
+            </a:r>
+          </a:p>
+        </p:txBody>
+      </p:sp>
+      <p:sp>
+        <p:nvSpPr>
+          <p:cNvPr id="4" name="한 줄 문구"/>
           <p:cNvSpPr txBox="1"/>
           <p:nvPr/>
         </p:nvSpPr>
         <p:spPr>
           <a:xfrm>
-            <a:off x="1463003" y="3794760"/>
-            <a:ext cx="9265688" cy="822960"/>
+            <a:off x="853418" y="3749039"/>
+            <a:ext cx="6095847" cy="822960"/>
           </a:xfrm>
           <a:prstGeom prst="rect">
             <a:avLst/>
@@ -7440,7 +5442,7 @@
           </a:bodyPr>
           <a:lstStyle/>
           <a:p>
-            <a:pPr algn="ctr">
+            <a:pPr algn="l">
               <a:lnSpc>
                 <a:spcPct val="115000"/>
               </a:lnSpc>
@@ -7451,21 +5453,21 @@
                   <a:srgbClr val="492713"/>
                 </a:solidFill>
               </a:rPr>
-              <a:t>첫 번째 생일을 축하해 주셔서 고맙습니다</a:t>
-            </a:r>
-          </a:p>
-        </p:txBody>
-      </p:sp>
-      <p:sp>
-        <p:nvSpPr>
-          <p:cNvPr id="17" name="안내 문구"/>
+              <a:t>아이가 한 살이 되었습니다</a:t>
+            </a:r>
+          </a:p>
+        </p:txBody>
+      </p:sp>
+      <p:sp>
+        <p:nvSpPr>
+          <p:cNvPr id="5" name="안내 문구"/>
           <p:cNvSpPr txBox="1"/>
           <p:nvPr/>
         </p:nvSpPr>
         <p:spPr>
           <a:xfrm>
-            <a:off x="1463003" y="4663440"/>
-            <a:ext cx="9265688" cy="914400"/>
+            <a:off x="853418" y="4617720"/>
+            <a:ext cx="6095847" cy="914400"/>
           </a:xfrm>
           <a:prstGeom prst="rect">
             <a:avLst/>
@@ -7478,7 +5480,7 @@
           </a:bodyPr>
           <a:lstStyle/>
           <a:p>
-            <a:pPr algn="ctr">
+            <a:pPr algn="l">
               <a:lnSpc>
                 <a:spcPct val="115000"/>
               </a:lnSpc>

--- a/public/fun/pack/pptx/birthday/돌잔치_38_사진중심_군고구마골목.pptx
+++ b/public/fun/pack/pptx/birthday/돌잔치_38_사진중심_군고구마골목.pptx
@@ -3286,6 +3286,14 @@
 <file path=ppt/slides/slide1.xml><?xml version="1.0" encoding="utf-8"?>
 <p:sld xmlns:a="http://schemas.openxmlformats.org/drawingml/2006/main" xmlns:p="http://schemas.openxmlformats.org/presentationml/2006/main" xmlns:r="http://schemas.openxmlformats.org/officeDocument/2006/relationships">
   <p:cSld>
+    <p:bg>
+      <p:bgPr>
+        <a:solidFill>
+          <a:srgbClr val="F6E1D5"/>
+        </a:solidFill>
+        <a:effectLst/>
+      </p:bgPr>
+    </p:bg>
     <p:spTree>
       <p:nvGrpSpPr>
         <p:cNvPr id="1" name=""/>
@@ -3293,30 +3301,116 @@
         <p:nvPr/>
       </p:nvGrpSpPr>
       <p:grpSpPr/>
-      <p:pic>
-        <p:nvPicPr>
-          <p:cNvPr id="3" name="표지 그림" descr="birthday-38.jpg"/>
-          <p:cNvPicPr>
-            <a:picLocks noChangeAspect="1"/>
-          </p:cNvPicPr>
+      <p:sp>
+        <p:nvSpPr>
+          <p:cNvPr id="3" name="사진 자리"/>
+          <p:cNvSpPr/>
           <p:nvPr/>
-        </p:nvPicPr>
-        <p:blipFill>
-          <a:blip r:embed="rId2"/>
-          <a:stretch>
-            <a:fillRect/>
-          </a:stretch>
-        </p:blipFill>
-        <p:spPr>
-          <a:xfrm>
-            <a:off x="0" y="0"/>
-            <a:ext cx="12191695" cy="6858000"/>
+        </p:nvSpPr>
+        <p:spPr>
+          <a:xfrm>
+            <a:off x="7802684" y="0"/>
+            <a:ext cx="4389010" cy="6858000"/>
           </a:xfrm>
           <a:prstGeom prst="rect">
             <a:avLst/>
           </a:prstGeom>
-        </p:spPr>
-      </p:pic>
+          <a:solidFill>
+            <a:srgbClr val="EBC4AD"/>
+          </a:solidFill>
+          <a:ln>
+            <a:noFill/>
+          </a:ln>
+        </p:spPr>
+        <p:txBody>
+          <a:bodyPr rtlCol="0" anchor="ctr" wrap="square" lIns="54864" rIns="54864" tIns="27432" bIns="27432">
+            <a:noAutofit/>
+          </a:bodyPr>
+          <a:lstStyle/>
+          <a:p>
+            <a:pPr algn="ctr">
+              <a:lnSpc>
+                <a:spcPct val="100000"/>
+              </a:lnSpc>
+            </a:pPr>
+            <a:r>
+              <a:rPr sz="1400" b="0" i="0">
+                <a:solidFill>
+                  <a:srgbClr val="493427"/>
+                </a:solidFill>
+              </a:rPr>
+              <a:t>사진을 넣어 주세요</a:t>
+            </a:r>
+          </a:p>
+        </p:txBody>
+      </p:sp>
+      <p:sp>
+        <p:nvSpPr>
+          <p:cNvPr id="4" name="장식"/>
+          <p:cNvSpPr/>
+          <p:nvPr/>
+        </p:nvSpPr>
+        <p:spPr>
+          <a:xfrm>
+            <a:off x="8168435" y="365760"/>
+            <a:ext cx="3657508" cy="6126480"/>
+          </a:xfrm>
+          <a:prstGeom prst="rect">
+            <a:avLst/>
+          </a:prstGeom>
+          <a:noFill/>
+          <a:ln w="9525">
+            <a:solidFill>
+              <a:srgbClr val="26231F"/>
+            </a:solidFill>
+          </a:ln>
+        </p:spPr>
+        <p:txBody>
+          <a:bodyPr rtlCol="0" anchor="ctr"/>
+          <a:lstStyle/>
+          <a:p>
+            <a:pPr algn="ctr"/>
+          </a:p>
+        </p:txBody>
+      </p:sp>
+      <p:sp>
+        <p:nvSpPr>
+          <p:cNvPr id="5" name="라벨"/>
+          <p:cNvSpPr txBox="1"/>
+          <p:nvPr/>
+        </p:nvSpPr>
+        <p:spPr>
+          <a:xfrm>
+            <a:off x="822960" y="2148840"/>
+            <a:ext cx="5608179" cy="274320"/>
+          </a:xfrm>
+          <a:prstGeom prst="rect">
+            <a:avLst/>
+          </a:prstGeom>
+          <a:noFill/>
+        </p:spPr>
+        <p:txBody>
+          <a:bodyPr wrap="square" lIns="54864" rIns="54864" tIns="27432" bIns="27432" anchor="t">
+            <a:noAutofit/>
+          </a:bodyPr>
+          <a:lstStyle/>
+          <a:p>
+            <a:pPr algn="l">
+              <a:lnSpc>
+                <a:spcPct val="115000"/>
+              </a:lnSpc>
+            </a:pPr>
+            <a:r>
+              <a:rPr sz="1000" b="1" i="0" spc="250">
+                <a:solidFill>
+                  <a:srgbClr val="26231F"/>
+                </a:solidFill>
+              </a:rPr>
+              <a:t>FIRST BIRTHDAY</a:t>
+            </a:r>
+          </a:p>
+        </p:txBody>
+      </p:sp>
       <p:sp>
         <p:nvSpPr>
           <p:cNvPr id="2" name="Title 1"/>
@@ -3329,8 +3423,8 @@
         </p:nvSpPr>
         <p:spPr>
           <a:xfrm>
-            <a:off x="853418" y="2057400"/>
-            <a:ext cx="6095847" cy="1554480"/>
+            <a:off x="822960" y="2606040"/>
+            <a:ext cx="5608179" cy="1188720"/>
           </a:xfrm>
         </p:spPr>
         <p:txBody>
@@ -3347,7 +3441,7 @@
             <a:r>
               <a:rPr sz="4000" b="1" i="0">
                 <a:solidFill>
-                  <a:srgbClr val="492713"/>
+                  <a:srgbClr val="26231F"/>
                 </a:solidFill>
               </a:rPr>
               <a:t>첫 번째 생일</a:t>
@@ -3357,14 +3451,14 @@
       </p:sp>
       <p:sp>
         <p:nvSpPr>
-          <p:cNvPr id="4" name="한 줄 문구"/>
+          <p:cNvPr id="6" name="한 줄 문구"/>
           <p:cNvSpPr txBox="1"/>
           <p:nvPr/>
         </p:nvSpPr>
         <p:spPr>
           <a:xfrm>
-            <a:off x="853418" y="3749039"/>
-            <a:ext cx="6095847" cy="822960"/>
+            <a:off x="822960" y="3886200"/>
+            <a:ext cx="5608179" cy="822960"/>
           </a:xfrm>
           <a:prstGeom prst="rect">
             <a:avLst/>
@@ -3383,9 +3477,9 @@
               </a:lnSpc>
             </a:pPr>
             <a:r>
-              <a:rPr sz="1700" b="0" i="1">
+              <a:rPr sz="1700" b="0" i="0">
                 <a:solidFill>
-                  <a:srgbClr val="492713"/>
+                  <a:srgbClr val="26231F"/>
                 </a:solidFill>
               </a:rPr>
               <a:t>가족사진 한 장은 꼭 남기려 합니다</a:t>
@@ -3395,14 +3489,14 @@
       </p:sp>
       <p:sp>
         <p:nvSpPr>
-          <p:cNvPr id="5" name="안내 문구"/>
+          <p:cNvPr id="7" name="안내 문구"/>
           <p:cNvSpPr txBox="1"/>
           <p:nvPr/>
         </p:nvSpPr>
         <p:spPr>
           <a:xfrm>
-            <a:off x="853418" y="4617720"/>
-            <a:ext cx="6095847" cy="914400"/>
+            <a:off x="822960" y="4754880"/>
+            <a:ext cx="5608179" cy="914400"/>
           </a:xfrm>
           <a:prstGeom prst="rect">
             <a:avLst/>
@@ -3423,10 +3517,10 @@
             <a:r>
               <a:rPr sz="1400" b="0" i="0">
                 <a:solidFill>
-                  <a:srgbClr val="666666"/>
+                  <a:srgbClr val="26231F"/>
                 </a:solidFill>
               </a:rPr>
-              <a:t>아기 이름 · 2027. 00. 00</a:t>
+              <a:t>아기 이름 · 날짜 입력</a:t>
             </a:r>
           </a:p>
           <a:p>
@@ -3438,7 +3532,7 @@
             <a:r>
               <a:rPr sz="1400" b="0" i="0">
                 <a:solidFill>
-                  <a:srgbClr val="666666"/>
+                  <a:srgbClr val="26231F"/>
                 </a:solidFill>
               </a:rPr>
               <a:t>장소를 입력하세요</a:t>
@@ -3460,7 +3554,7 @@
     <p:bg>
       <p:bgPr>
         <a:solidFill>
-          <a:srgbClr val="FBF3EF"/>
+          <a:srgbClr val="FFFFFF"/>
         </a:solidFill>
         <a:effectLst/>
       </p:bgPr>
@@ -3480,46 +3574,113 @@
         </p:nvSpPr>
         <p:spPr>
           <a:xfrm>
-            <a:off x="256032" y="256032"/>
-            <a:ext cx="11679631" cy="6345936"/>
+            <a:off x="0" y="6565392"/>
+            <a:ext cx="12191695" cy="292608"/>
+          </a:xfrm>
+          <a:prstGeom prst="rect">
+            <a:avLst/>
+          </a:prstGeom>
+          <a:solidFill>
+            <a:srgbClr val="EBC4AD"/>
+          </a:solidFill>
+          <a:ln>
+            <a:noFill/>
+          </a:ln>
+        </p:spPr>
+        <p:txBody>
+          <a:bodyPr rtlCol="0" anchor="ctr"/>
+          <a:lstStyle/>
+          <a:p>
+            <a:pPr algn="ctr"/>
+          </a:p>
+        </p:txBody>
+      </p:sp>
+      <p:sp>
+        <p:nvSpPr>
+          <p:cNvPr id="4" name="장식"/>
+          <p:cNvSpPr/>
+          <p:nvPr/>
+        </p:nvSpPr>
+        <p:spPr>
+          <a:xfrm>
+            <a:off x="10180015" y="-1645920"/>
+            <a:ext cx="3474720" cy="3474720"/>
+          </a:xfrm>
+          <a:prstGeom prst="ellipse">
+            <a:avLst/>
+          </a:prstGeom>
+          <a:solidFill>
+            <a:srgbClr val="EBC4AD"/>
+          </a:solidFill>
+          <a:ln>
+            <a:noFill/>
+          </a:ln>
+        </p:spPr>
+        <p:txBody>
+          <a:bodyPr rtlCol="0" anchor="ctr"/>
+          <a:lstStyle/>
+          <a:p>
+            <a:pPr algn="ctr"/>
+          </a:p>
+        </p:txBody>
+      </p:sp>
+      <p:sp>
+        <p:nvSpPr>
+          <p:cNvPr id="5" name="상단 라벨"/>
+          <p:cNvSpPr txBox="1"/>
+          <p:nvPr/>
+        </p:nvSpPr>
+        <p:spPr>
+          <a:xfrm>
+            <a:off x="640080" y="274320"/>
+            <a:ext cx="5486400" cy="274320"/>
           </a:xfrm>
           <a:prstGeom prst="rect">
             <a:avLst/>
           </a:prstGeom>
           <a:noFill/>
-          <a:ln w="28575">
-            <a:solidFill>
-              <a:srgbClr val="995229"/>
-            </a:solidFill>
-          </a:ln>
-        </p:spPr>
-        <p:txBody>
-          <a:bodyPr rtlCol="0" anchor="ctr"/>
-          <a:lstStyle/>
-          <a:p>
-            <a:pPr algn="ctr"/>
-          </a:p>
-        </p:txBody>
-      </p:sp>
-      <p:sp>
-        <p:nvSpPr>
-          <p:cNvPr id="4" name="장식"/>
+        </p:spPr>
+        <p:txBody>
+          <a:bodyPr wrap="square" lIns="54864" rIns="54864" tIns="27432" bIns="27432" anchor="ctr">
+            <a:noAutofit/>
+          </a:bodyPr>
+          <a:lstStyle/>
+          <a:p>
+            <a:pPr algn="l">
+              <a:lnSpc>
+                <a:spcPct val="115000"/>
+              </a:lnSpc>
+            </a:pPr>
+            <a:r>
+              <a:rPr sz="900" b="1" i="0" spc="250">
+                <a:solidFill>
+                  <a:srgbClr val="26231F"/>
+                </a:solidFill>
+              </a:rPr>
+              <a:t>FIRST BIRTHDAY</a:t>
+            </a:r>
+          </a:p>
+        </p:txBody>
+      </p:sp>
+      <p:sp>
+        <p:nvSpPr>
+          <p:cNvPr id="6" name="포인트"/>
           <p:cNvSpPr/>
           <p:nvPr/>
         </p:nvSpPr>
         <p:spPr>
           <a:xfrm>
-            <a:off x="384048" y="384048"/>
-            <a:ext cx="11423599" cy="6089904"/>
-          </a:xfrm>
-          <a:prstGeom prst="rect">
+            <a:off x="11048695" y="502919"/>
+            <a:ext cx="274320" cy="274320"/>
+          </a:xfrm>
+          <a:prstGeom prst="round2SameRect">
             <a:avLst/>
           </a:prstGeom>
-          <a:noFill/>
-          <a:ln w="9525">
-            <a:solidFill>
-              <a:srgbClr val="F4DBCD"/>
-            </a:solidFill>
+          <a:solidFill>
+            <a:srgbClr val="FFFFFF"/>
+          </a:solidFill>
+          <a:ln>
+            <a:noFill/>
           </a:ln>
         </p:spPr>
         <p:txBody>
@@ -3542,8 +3703,8 @@
         </p:nvSpPr>
         <p:spPr>
           <a:xfrm>
-            <a:off x="822960" y="548640"/>
-            <a:ext cx="9265615" cy="822960"/>
+            <a:off x="640080" y="658368"/>
+            <a:ext cx="9082735" cy="868680"/>
           </a:xfrm>
         </p:spPr>
         <p:txBody>
@@ -3560,7 +3721,7 @@
             <a:r>
               <a:rPr sz="3000" b="1" i="0">
                 <a:solidFill>
-                  <a:srgbClr val="492713"/>
+                  <a:srgbClr val="26231F"/>
                 </a:solidFill>
               </a:rPr>
               <a:t>우리 아기를 소개합니다</a:t>
@@ -3570,14 +3731,14 @@
       </p:sp>
       <p:sp>
         <p:nvSpPr>
-          <p:cNvPr id="5" name="사진 자리"/>
+          <p:cNvPr id="7" name="사진 자리"/>
           <p:cNvSpPr/>
           <p:nvPr/>
         </p:nvSpPr>
         <p:spPr>
           <a:xfrm>
-            <a:off x="822960" y="1554480"/>
-            <a:ext cx="3840480" cy="4434840"/>
+            <a:off x="640080" y="1783080"/>
+            <a:ext cx="3840480" cy="4206240"/>
           </a:xfrm>
           <a:prstGeom prst="roundRect">
             <a:avLst>
@@ -3585,12 +3746,10 @@
             </a:avLst>
           </a:prstGeom>
           <a:solidFill>
-            <a:srgbClr val="F4DBCD"/>
+            <a:srgbClr val="F6E1D5"/>
           </a:solidFill>
           <a:ln w="19050">
-            <a:solidFill>
-              <a:srgbClr val="995229"/>
-            </a:solidFill>
+            <a:noFill/>
             <a:prstDash val="dash"/>
           </a:ln>
         </p:spPr>
@@ -3608,7 +3767,7 @@
             <a:r>
               <a:rPr sz="1400" b="0" i="0">
                 <a:solidFill>
-                  <a:srgbClr val="492713"/>
+                  <a:srgbClr val="8E8780"/>
                 </a:solidFill>
               </a:rPr>
               <a:t>아기 사진을 넣어 주세요</a:t>
@@ -3618,15 +3777,15 @@
       </p:sp>
       <p:graphicFrame>
         <p:nvGraphicFramePr>
-          <p:cNvPr id="6" name="표"/>
+          <p:cNvPr id="8" name="표"/>
           <p:cNvGraphicFramePr>
             <a:graphicFrameLocks noGrp="1"/>
           </p:cNvGraphicFramePr>
           <p:nvPr/>
         </p:nvGraphicFramePr>
         <p:xfrm>
-          <a:off x="5029200" y="1554480"/>
-          <a:ext cx="6339535" cy="3950208"/>
+          <a:off x="4846320" y="1783080"/>
+          <a:ext cx="6705295" cy="3950208"/>
         </p:xfrm>
         <a:graphic>
           <a:graphicData uri="http://schemas.openxmlformats.org/drawingml/2006/table">
@@ -3636,7 +3795,7 @@
               </a:tblPr>
               <a:tblGrid>
                 <a:gridCol w="1828800"/>
-                <a:gridCol w="4510735"/>
+                <a:gridCol w="4876495"/>
               </a:tblGrid>
               <a:tr h="658368">
                 <a:tc>
@@ -3648,7 +3807,7 @@
                       <a:r>
                         <a:rPr sz="1500" b="1">
                           <a:solidFill>
-                            <a:srgbClr val="492713"/>
+                            <a:srgbClr val="493427"/>
                           </a:solidFill>
                         </a:rPr>
                         <a:t>이름</a:t>
@@ -3658,30 +3817,30 @@
                   <a:tcPr anchor="ctr" marL="73152" marR="73152">
                     <a:lnL w="9525" cap="flat" cmpd="sng" algn="ctr">
                       <a:solidFill>
-                        <a:srgbClr val="F4DBCD"/>
+                        <a:srgbClr val="F6E1D5"/>
                       </a:solidFill>
                       <a:prstDash val="solid"/>
                     </a:lnL>
                     <a:lnR w="9525" cap="flat" cmpd="sng" algn="ctr">
                       <a:solidFill>
-                        <a:srgbClr val="F4DBCD"/>
+                        <a:srgbClr val="F6E1D5"/>
                       </a:solidFill>
                       <a:prstDash val="solid"/>
                     </a:lnR>
                     <a:lnT w="9525" cap="flat" cmpd="sng" algn="ctr">
                       <a:solidFill>
-                        <a:srgbClr val="F4DBCD"/>
+                        <a:srgbClr val="F6E1D5"/>
                       </a:solidFill>
                       <a:prstDash val="solid"/>
                     </a:lnT>
                     <a:lnB w="9525" cap="flat" cmpd="sng" algn="ctr">
                       <a:solidFill>
-                        <a:srgbClr val="F4DBCD"/>
+                        <a:srgbClr val="F6E1D5"/>
                       </a:solidFill>
                       <a:prstDash val="solid"/>
                     </a:lnB>
                     <a:solidFill>
-                      <a:srgbClr val="F4DBCD"/>
+                      <a:srgbClr val="F6E1D5"/>
                     </a:solidFill>
                   </a:tcPr>
                 </a:tc>
@@ -3694,7 +3853,7 @@
                       <a:r>
                         <a:rPr sz="1500" b="0">
                           <a:solidFill>
-                            <a:srgbClr val="2B2B2B"/>
+                            <a:srgbClr val="26231F"/>
                           </a:solidFill>
                         </a:rPr>
                         <a:t>입력하세요</a:t>
@@ -3704,30 +3863,30 @@
                   <a:tcPr anchor="ctr" marL="73152" marR="73152">
                     <a:lnL w="9525" cap="flat" cmpd="sng" algn="ctr">
                       <a:solidFill>
-                        <a:srgbClr val="F4DBCD"/>
+                        <a:srgbClr val="F6E1D5"/>
                       </a:solidFill>
                       <a:prstDash val="solid"/>
                     </a:lnL>
                     <a:lnR w="9525" cap="flat" cmpd="sng" algn="ctr">
                       <a:solidFill>
-                        <a:srgbClr val="F4DBCD"/>
+                        <a:srgbClr val="F6E1D5"/>
                       </a:solidFill>
                       <a:prstDash val="solid"/>
                     </a:lnR>
                     <a:lnT w="9525" cap="flat" cmpd="sng" algn="ctr">
                       <a:solidFill>
-                        <a:srgbClr val="F4DBCD"/>
+                        <a:srgbClr val="F6E1D5"/>
                       </a:solidFill>
                       <a:prstDash val="solid"/>
                     </a:lnT>
                     <a:lnB w="9525" cap="flat" cmpd="sng" algn="ctr">
                       <a:solidFill>
-                        <a:srgbClr val="F4DBCD"/>
+                        <a:srgbClr val="F6E1D5"/>
                       </a:solidFill>
                       <a:prstDash val="solid"/>
                     </a:lnB>
                     <a:solidFill>
-                      <a:srgbClr val="FBF3EF"/>
+                      <a:srgbClr val="FBF2EC"/>
                     </a:solidFill>
                   </a:tcPr>
                 </a:tc>
@@ -3742,7 +3901,7 @@
                       <a:r>
                         <a:rPr sz="1500" b="1">
                           <a:solidFill>
-                            <a:srgbClr val="492713"/>
+                            <a:srgbClr val="493427"/>
                           </a:solidFill>
                         </a:rPr>
                         <a:t>생일</a:t>
@@ -3752,30 +3911,30 @@
                   <a:tcPr anchor="ctr" marL="73152" marR="73152">
                     <a:lnL w="9525" cap="flat" cmpd="sng" algn="ctr">
                       <a:solidFill>
-                        <a:srgbClr val="F4DBCD"/>
+                        <a:srgbClr val="F6E1D5"/>
                       </a:solidFill>
                       <a:prstDash val="solid"/>
                     </a:lnL>
                     <a:lnR w="9525" cap="flat" cmpd="sng" algn="ctr">
                       <a:solidFill>
-                        <a:srgbClr val="F4DBCD"/>
+                        <a:srgbClr val="F6E1D5"/>
                       </a:solidFill>
                       <a:prstDash val="solid"/>
                     </a:lnR>
                     <a:lnT w="9525" cap="flat" cmpd="sng" algn="ctr">
                       <a:solidFill>
-                        <a:srgbClr val="F4DBCD"/>
+                        <a:srgbClr val="F6E1D5"/>
                       </a:solidFill>
                       <a:prstDash val="solid"/>
                     </a:lnT>
                     <a:lnB w="9525" cap="flat" cmpd="sng" algn="ctr">
                       <a:solidFill>
-                        <a:srgbClr val="F4DBCD"/>
+                        <a:srgbClr val="F6E1D5"/>
                       </a:solidFill>
                       <a:prstDash val="solid"/>
                     </a:lnB>
                     <a:solidFill>
-                      <a:srgbClr val="F4DBCD"/>
+                      <a:srgbClr val="F6E1D5"/>
                     </a:solidFill>
                   </a:tcPr>
                 </a:tc>
@@ -3788,7 +3947,7 @@
                       <a:r>
                         <a:rPr sz="1500" b="0">
                           <a:solidFill>
-                            <a:srgbClr val="2B2B2B"/>
+                            <a:srgbClr val="26231F"/>
                           </a:solidFill>
                         </a:rPr>
                         <a:t>입력하세요</a:t>
@@ -3798,25 +3957,25 @@
                   <a:tcPr anchor="ctr" marL="73152" marR="73152">
                     <a:lnL w="9525" cap="flat" cmpd="sng" algn="ctr">
                       <a:solidFill>
-                        <a:srgbClr val="F4DBCD"/>
+                        <a:srgbClr val="F6E1D5"/>
                       </a:solidFill>
                       <a:prstDash val="solid"/>
                     </a:lnL>
                     <a:lnR w="9525" cap="flat" cmpd="sng" algn="ctr">
                       <a:solidFill>
-                        <a:srgbClr val="F4DBCD"/>
+                        <a:srgbClr val="F6E1D5"/>
                       </a:solidFill>
                       <a:prstDash val="solid"/>
                     </a:lnR>
                     <a:lnT w="9525" cap="flat" cmpd="sng" algn="ctr">
                       <a:solidFill>
-                        <a:srgbClr val="F4DBCD"/>
+                        <a:srgbClr val="F6E1D5"/>
                       </a:solidFill>
                       <a:prstDash val="solid"/>
                     </a:lnT>
                     <a:lnB w="9525" cap="flat" cmpd="sng" algn="ctr">
                       <a:solidFill>
-                        <a:srgbClr val="F4DBCD"/>
+                        <a:srgbClr val="F6E1D5"/>
                       </a:solidFill>
                       <a:prstDash val="solid"/>
                     </a:lnB>
@@ -3836,7 +3995,7 @@
                       <a:r>
                         <a:rPr sz="1500" b="1">
                           <a:solidFill>
-                            <a:srgbClr val="492713"/>
+                            <a:srgbClr val="493427"/>
                           </a:solidFill>
                         </a:rPr>
                         <a:t>키 · 몸무게</a:t>
@@ -3846,30 +4005,30 @@
                   <a:tcPr anchor="ctr" marL="73152" marR="73152">
                     <a:lnL w="9525" cap="flat" cmpd="sng" algn="ctr">
                       <a:solidFill>
-                        <a:srgbClr val="F4DBCD"/>
+                        <a:srgbClr val="F6E1D5"/>
                       </a:solidFill>
                       <a:prstDash val="solid"/>
                     </a:lnL>
                     <a:lnR w="9525" cap="flat" cmpd="sng" algn="ctr">
                       <a:solidFill>
-                        <a:srgbClr val="F4DBCD"/>
+                        <a:srgbClr val="F6E1D5"/>
                       </a:solidFill>
                       <a:prstDash val="solid"/>
                     </a:lnR>
                     <a:lnT w="9525" cap="flat" cmpd="sng" algn="ctr">
                       <a:solidFill>
-                        <a:srgbClr val="F4DBCD"/>
+                        <a:srgbClr val="F6E1D5"/>
                       </a:solidFill>
                       <a:prstDash val="solid"/>
                     </a:lnT>
                     <a:lnB w="9525" cap="flat" cmpd="sng" algn="ctr">
                       <a:solidFill>
-                        <a:srgbClr val="F4DBCD"/>
+                        <a:srgbClr val="F6E1D5"/>
                       </a:solidFill>
                       <a:prstDash val="solid"/>
                     </a:lnB>
                     <a:solidFill>
-                      <a:srgbClr val="F4DBCD"/>
+                      <a:srgbClr val="F6E1D5"/>
                     </a:solidFill>
                   </a:tcPr>
                 </a:tc>
@@ -3882,7 +4041,7 @@
                       <a:r>
                         <a:rPr sz="1500" b="0">
                           <a:solidFill>
-                            <a:srgbClr val="2B2B2B"/>
+                            <a:srgbClr val="26231F"/>
                           </a:solidFill>
                         </a:rPr>
                         <a:t>입력하세요</a:t>
@@ -3892,30 +4051,30 @@
                   <a:tcPr anchor="ctr" marL="73152" marR="73152">
                     <a:lnL w="9525" cap="flat" cmpd="sng" algn="ctr">
                       <a:solidFill>
-                        <a:srgbClr val="F4DBCD"/>
+                        <a:srgbClr val="F6E1D5"/>
                       </a:solidFill>
                       <a:prstDash val="solid"/>
                     </a:lnL>
                     <a:lnR w="9525" cap="flat" cmpd="sng" algn="ctr">
                       <a:solidFill>
-                        <a:srgbClr val="F4DBCD"/>
+                        <a:srgbClr val="F6E1D5"/>
                       </a:solidFill>
                       <a:prstDash val="solid"/>
                     </a:lnR>
                     <a:lnT w="9525" cap="flat" cmpd="sng" algn="ctr">
                       <a:solidFill>
-                        <a:srgbClr val="F4DBCD"/>
+                        <a:srgbClr val="F6E1D5"/>
                       </a:solidFill>
                       <a:prstDash val="solid"/>
                     </a:lnT>
                     <a:lnB w="9525" cap="flat" cmpd="sng" algn="ctr">
                       <a:solidFill>
-                        <a:srgbClr val="F4DBCD"/>
+                        <a:srgbClr val="F6E1D5"/>
                       </a:solidFill>
                       <a:prstDash val="solid"/>
                     </a:lnB>
                     <a:solidFill>
-                      <a:srgbClr val="FBF3EF"/>
+                      <a:srgbClr val="FBF2EC"/>
                     </a:solidFill>
                   </a:tcPr>
                 </a:tc>
@@ -3930,7 +4089,7 @@
                       <a:r>
                         <a:rPr sz="1500" b="1">
                           <a:solidFill>
-                            <a:srgbClr val="492713"/>
+                            <a:srgbClr val="493427"/>
                           </a:solidFill>
                         </a:rPr>
                         <a:t>좋아하는 것</a:t>
@@ -3940,30 +4099,30 @@
                   <a:tcPr anchor="ctr" marL="73152" marR="73152">
                     <a:lnL w="9525" cap="flat" cmpd="sng" algn="ctr">
                       <a:solidFill>
-                        <a:srgbClr val="F4DBCD"/>
+                        <a:srgbClr val="F6E1D5"/>
                       </a:solidFill>
                       <a:prstDash val="solid"/>
                     </a:lnL>
                     <a:lnR w="9525" cap="flat" cmpd="sng" algn="ctr">
                       <a:solidFill>
-                        <a:srgbClr val="F4DBCD"/>
+                        <a:srgbClr val="F6E1D5"/>
                       </a:solidFill>
                       <a:prstDash val="solid"/>
                     </a:lnR>
                     <a:lnT w="9525" cap="flat" cmpd="sng" algn="ctr">
                       <a:solidFill>
-                        <a:srgbClr val="F4DBCD"/>
+                        <a:srgbClr val="F6E1D5"/>
                       </a:solidFill>
                       <a:prstDash val="solid"/>
                     </a:lnT>
                     <a:lnB w="9525" cap="flat" cmpd="sng" algn="ctr">
                       <a:solidFill>
-                        <a:srgbClr val="F4DBCD"/>
+                        <a:srgbClr val="F6E1D5"/>
                       </a:solidFill>
                       <a:prstDash val="solid"/>
                     </a:lnB>
                     <a:solidFill>
-                      <a:srgbClr val="F4DBCD"/>
+                      <a:srgbClr val="F6E1D5"/>
                     </a:solidFill>
                   </a:tcPr>
                 </a:tc>
@@ -3976,7 +4135,7 @@
                       <a:r>
                         <a:rPr sz="1500" b="0">
                           <a:solidFill>
-                            <a:srgbClr val="2B2B2B"/>
+                            <a:srgbClr val="26231F"/>
                           </a:solidFill>
                         </a:rPr>
                         <a:t>입력하세요</a:t>
@@ -3986,25 +4145,25 @@
                   <a:tcPr anchor="ctr" marL="73152" marR="73152">
                     <a:lnL w="9525" cap="flat" cmpd="sng" algn="ctr">
                       <a:solidFill>
-                        <a:srgbClr val="F4DBCD"/>
+                        <a:srgbClr val="F6E1D5"/>
                       </a:solidFill>
                       <a:prstDash val="solid"/>
                     </a:lnL>
                     <a:lnR w="9525" cap="flat" cmpd="sng" algn="ctr">
                       <a:solidFill>
-                        <a:srgbClr val="F4DBCD"/>
+                        <a:srgbClr val="F6E1D5"/>
                       </a:solidFill>
                       <a:prstDash val="solid"/>
                     </a:lnR>
                     <a:lnT w="9525" cap="flat" cmpd="sng" algn="ctr">
                       <a:solidFill>
-                        <a:srgbClr val="F4DBCD"/>
+                        <a:srgbClr val="F6E1D5"/>
                       </a:solidFill>
                       <a:prstDash val="solid"/>
                     </a:lnT>
                     <a:lnB w="9525" cap="flat" cmpd="sng" algn="ctr">
                       <a:solidFill>
-                        <a:srgbClr val="F4DBCD"/>
+                        <a:srgbClr val="F6E1D5"/>
                       </a:solidFill>
                       <a:prstDash val="solid"/>
                     </a:lnB>
@@ -4024,7 +4183,7 @@
                       <a:r>
                         <a:rPr sz="1500" b="1">
                           <a:solidFill>
-                            <a:srgbClr val="492713"/>
+                            <a:srgbClr val="493427"/>
                           </a:solidFill>
                         </a:rPr>
                         <a:t>별명</a:t>
@@ -4034,30 +4193,30 @@
                   <a:tcPr anchor="ctr" marL="73152" marR="73152">
                     <a:lnL w="9525" cap="flat" cmpd="sng" algn="ctr">
                       <a:solidFill>
-                        <a:srgbClr val="F4DBCD"/>
+                        <a:srgbClr val="F6E1D5"/>
                       </a:solidFill>
                       <a:prstDash val="solid"/>
                     </a:lnL>
                     <a:lnR w="9525" cap="flat" cmpd="sng" algn="ctr">
                       <a:solidFill>
-                        <a:srgbClr val="F4DBCD"/>
+                        <a:srgbClr val="F6E1D5"/>
                       </a:solidFill>
                       <a:prstDash val="solid"/>
                     </a:lnR>
                     <a:lnT w="9525" cap="flat" cmpd="sng" algn="ctr">
                       <a:solidFill>
-                        <a:srgbClr val="F4DBCD"/>
+                        <a:srgbClr val="F6E1D5"/>
                       </a:solidFill>
                       <a:prstDash val="solid"/>
                     </a:lnT>
                     <a:lnB w="9525" cap="flat" cmpd="sng" algn="ctr">
                       <a:solidFill>
-                        <a:srgbClr val="F4DBCD"/>
+                        <a:srgbClr val="F6E1D5"/>
                       </a:solidFill>
                       <a:prstDash val="solid"/>
                     </a:lnB>
                     <a:solidFill>
-                      <a:srgbClr val="F4DBCD"/>
+                      <a:srgbClr val="F6E1D5"/>
                     </a:solidFill>
                   </a:tcPr>
                 </a:tc>
@@ -4070,7 +4229,7 @@
                       <a:r>
                         <a:rPr sz="1500" b="0">
                           <a:solidFill>
-                            <a:srgbClr val="2B2B2B"/>
+                            <a:srgbClr val="26231F"/>
                           </a:solidFill>
                         </a:rPr>
                         <a:t>입력하세요</a:t>
@@ -4080,30 +4239,30 @@
                   <a:tcPr anchor="ctr" marL="73152" marR="73152">
                     <a:lnL w="9525" cap="flat" cmpd="sng" algn="ctr">
                       <a:solidFill>
-                        <a:srgbClr val="F4DBCD"/>
+                        <a:srgbClr val="F6E1D5"/>
                       </a:solidFill>
                       <a:prstDash val="solid"/>
                     </a:lnL>
                     <a:lnR w="9525" cap="flat" cmpd="sng" algn="ctr">
                       <a:solidFill>
-                        <a:srgbClr val="F4DBCD"/>
+                        <a:srgbClr val="F6E1D5"/>
                       </a:solidFill>
                       <a:prstDash val="solid"/>
                     </a:lnR>
                     <a:lnT w="9525" cap="flat" cmpd="sng" algn="ctr">
                       <a:solidFill>
-                        <a:srgbClr val="F4DBCD"/>
+                        <a:srgbClr val="F6E1D5"/>
                       </a:solidFill>
                       <a:prstDash val="solid"/>
                     </a:lnT>
                     <a:lnB w="9525" cap="flat" cmpd="sng" algn="ctr">
                       <a:solidFill>
-                        <a:srgbClr val="F4DBCD"/>
+                        <a:srgbClr val="F6E1D5"/>
                       </a:solidFill>
                       <a:prstDash val="solid"/>
                     </a:lnB>
                     <a:solidFill>
-                      <a:srgbClr val="FBF3EF"/>
+                      <a:srgbClr val="FBF2EC"/>
                     </a:solidFill>
                   </a:tcPr>
                 </a:tc>
@@ -4118,7 +4277,7 @@
                       <a:r>
                         <a:rPr sz="1500" b="1">
                           <a:solidFill>
-                            <a:srgbClr val="492713"/>
+                            <a:srgbClr val="493427"/>
                           </a:solidFill>
                         </a:rPr>
                         <a:t>부모의 마음</a:t>
@@ -4128,30 +4287,30 @@
                   <a:tcPr anchor="ctr" marL="73152" marR="73152">
                     <a:lnL w="9525" cap="flat" cmpd="sng" algn="ctr">
                       <a:solidFill>
-                        <a:srgbClr val="F4DBCD"/>
+                        <a:srgbClr val="F6E1D5"/>
                       </a:solidFill>
                       <a:prstDash val="solid"/>
                     </a:lnL>
                     <a:lnR w="9525" cap="flat" cmpd="sng" algn="ctr">
                       <a:solidFill>
-                        <a:srgbClr val="F4DBCD"/>
+                        <a:srgbClr val="F6E1D5"/>
                       </a:solidFill>
                       <a:prstDash val="solid"/>
                     </a:lnR>
                     <a:lnT w="9525" cap="flat" cmpd="sng" algn="ctr">
                       <a:solidFill>
-                        <a:srgbClr val="F4DBCD"/>
+                        <a:srgbClr val="F6E1D5"/>
                       </a:solidFill>
                       <a:prstDash val="solid"/>
                     </a:lnT>
                     <a:lnB w="9525" cap="flat" cmpd="sng" algn="ctr">
                       <a:solidFill>
-                        <a:srgbClr val="F4DBCD"/>
+                        <a:srgbClr val="F6E1D5"/>
                       </a:solidFill>
                       <a:prstDash val="solid"/>
                     </a:lnB>
                     <a:solidFill>
-                      <a:srgbClr val="F4DBCD"/>
+                      <a:srgbClr val="F6E1D5"/>
                     </a:solidFill>
                   </a:tcPr>
                 </a:tc>
@@ -4164,7 +4323,7 @@
                       <a:r>
                         <a:rPr sz="1500" b="0">
                           <a:solidFill>
-                            <a:srgbClr val="2B2B2B"/>
+                            <a:srgbClr val="26231F"/>
                           </a:solidFill>
                         </a:rPr>
                         <a:t>입력하세요</a:t>
@@ -4174,25 +4333,25 @@
                   <a:tcPr anchor="ctr" marL="73152" marR="73152">
                     <a:lnL w="9525" cap="flat" cmpd="sng" algn="ctr">
                       <a:solidFill>
-                        <a:srgbClr val="F4DBCD"/>
+                        <a:srgbClr val="F6E1D5"/>
                       </a:solidFill>
                       <a:prstDash val="solid"/>
                     </a:lnL>
                     <a:lnR w="9525" cap="flat" cmpd="sng" algn="ctr">
                       <a:solidFill>
-                        <a:srgbClr val="F4DBCD"/>
+                        <a:srgbClr val="F6E1D5"/>
                       </a:solidFill>
                       <a:prstDash val="solid"/>
                     </a:lnR>
                     <a:lnT w="9525" cap="flat" cmpd="sng" algn="ctr">
                       <a:solidFill>
-                        <a:srgbClr val="F4DBCD"/>
+                        <a:srgbClr val="F6E1D5"/>
                       </a:solidFill>
                       <a:prstDash val="solid"/>
                     </a:lnT>
                     <a:lnB w="9525" cap="flat" cmpd="sng" algn="ctr">
                       <a:solidFill>
-                        <a:srgbClr val="F4DBCD"/>
+                        <a:srgbClr val="F6E1D5"/>
                       </a:solidFill>
                       <a:prstDash val="solid"/>
                     </a:lnB>
@@ -4220,7 +4379,7 @@
     <p:bg>
       <p:bgPr>
         <a:solidFill>
-          <a:srgbClr val="FBF3EF"/>
+          <a:srgbClr val="FFFFFF"/>
         </a:solidFill>
         <a:effectLst/>
       </p:bgPr>
@@ -4240,46 +4399,113 @@
         </p:nvSpPr>
         <p:spPr>
           <a:xfrm>
-            <a:off x="256032" y="256032"/>
-            <a:ext cx="11679631" cy="6345936"/>
+            <a:off x="0" y="6565392"/>
+            <a:ext cx="12191695" cy="292608"/>
+          </a:xfrm>
+          <a:prstGeom prst="rect">
+            <a:avLst/>
+          </a:prstGeom>
+          <a:solidFill>
+            <a:srgbClr val="EBC4AD"/>
+          </a:solidFill>
+          <a:ln>
+            <a:noFill/>
+          </a:ln>
+        </p:spPr>
+        <p:txBody>
+          <a:bodyPr rtlCol="0" anchor="ctr"/>
+          <a:lstStyle/>
+          <a:p>
+            <a:pPr algn="ctr"/>
+          </a:p>
+        </p:txBody>
+      </p:sp>
+      <p:sp>
+        <p:nvSpPr>
+          <p:cNvPr id="4" name="장식"/>
+          <p:cNvSpPr/>
+          <p:nvPr/>
+        </p:nvSpPr>
+        <p:spPr>
+          <a:xfrm>
+            <a:off x="10180015" y="-1645920"/>
+            <a:ext cx="3474720" cy="3474720"/>
+          </a:xfrm>
+          <a:prstGeom prst="ellipse">
+            <a:avLst/>
+          </a:prstGeom>
+          <a:solidFill>
+            <a:srgbClr val="EBC4AD"/>
+          </a:solidFill>
+          <a:ln>
+            <a:noFill/>
+          </a:ln>
+        </p:spPr>
+        <p:txBody>
+          <a:bodyPr rtlCol="0" anchor="ctr"/>
+          <a:lstStyle/>
+          <a:p>
+            <a:pPr algn="ctr"/>
+          </a:p>
+        </p:txBody>
+      </p:sp>
+      <p:sp>
+        <p:nvSpPr>
+          <p:cNvPr id="5" name="상단 라벨"/>
+          <p:cNvSpPr txBox="1"/>
+          <p:nvPr/>
+        </p:nvSpPr>
+        <p:spPr>
+          <a:xfrm>
+            <a:off x="640080" y="274320"/>
+            <a:ext cx="5486400" cy="274320"/>
           </a:xfrm>
           <a:prstGeom prst="rect">
             <a:avLst/>
           </a:prstGeom>
           <a:noFill/>
-          <a:ln w="28575">
-            <a:solidFill>
-              <a:srgbClr val="995229"/>
-            </a:solidFill>
-          </a:ln>
-        </p:spPr>
-        <p:txBody>
-          <a:bodyPr rtlCol="0" anchor="ctr"/>
-          <a:lstStyle/>
-          <a:p>
-            <a:pPr algn="ctr"/>
-          </a:p>
-        </p:txBody>
-      </p:sp>
-      <p:sp>
-        <p:nvSpPr>
-          <p:cNvPr id="4" name="장식"/>
+        </p:spPr>
+        <p:txBody>
+          <a:bodyPr wrap="square" lIns="54864" rIns="54864" tIns="27432" bIns="27432" anchor="ctr">
+            <a:noAutofit/>
+          </a:bodyPr>
+          <a:lstStyle/>
+          <a:p>
+            <a:pPr algn="l">
+              <a:lnSpc>
+                <a:spcPct val="115000"/>
+              </a:lnSpc>
+            </a:pPr>
+            <a:r>
+              <a:rPr sz="900" b="1" i="0" spc="250">
+                <a:solidFill>
+                  <a:srgbClr val="26231F"/>
+                </a:solidFill>
+              </a:rPr>
+              <a:t>FIRST BIRTHDAY</a:t>
+            </a:r>
+          </a:p>
+        </p:txBody>
+      </p:sp>
+      <p:sp>
+        <p:nvSpPr>
+          <p:cNvPr id="6" name="포인트"/>
           <p:cNvSpPr/>
           <p:nvPr/>
         </p:nvSpPr>
         <p:spPr>
           <a:xfrm>
-            <a:off x="384048" y="384048"/>
-            <a:ext cx="11423599" cy="6089904"/>
-          </a:xfrm>
-          <a:prstGeom prst="rect">
+            <a:off x="11048695" y="502919"/>
+            <a:ext cx="274320" cy="274320"/>
+          </a:xfrm>
+          <a:prstGeom prst="round2SameRect">
             <a:avLst/>
           </a:prstGeom>
-          <a:noFill/>
-          <a:ln w="9525">
-            <a:solidFill>
-              <a:srgbClr val="F4DBCD"/>
-            </a:solidFill>
+          <a:solidFill>
+            <a:srgbClr val="FFFFFF"/>
+          </a:solidFill>
+          <a:ln>
+            <a:noFill/>
           </a:ln>
         </p:spPr>
         <p:txBody>
@@ -4302,8 +4528,8 @@
         </p:nvSpPr>
         <p:spPr>
           <a:xfrm>
-            <a:off x="822960" y="548640"/>
-            <a:ext cx="9265615" cy="822960"/>
+            <a:off x="640080" y="658368"/>
+            <a:ext cx="9082735" cy="868680"/>
           </a:xfrm>
         </p:spPr>
         <p:txBody>
@@ -4320,7 +4546,7 @@
             <a:r>
               <a:rPr sz="3000" b="1" i="0">
                 <a:solidFill>
-                  <a:srgbClr val="492713"/>
+                  <a:srgbClr val="26231F"/>
                 </a:solidFill>
               </a:rPr>
               <a:t>첫 번째 생일 사진</a:t>
@@ -4330,14 +4556,14 @@
       </p:sp>
       <p:sp>
         <p:nvSpPr>
-          <p:cNvPr id="5" name="사진 자리"/>
+          <p:cNvPr id="7" name="사진 자리"/>
           <p:cNvSpPr/>
           <p:nvPr/>
         </p:nvSpPr>
         <p:spPr>
           <a:xfrm>
-            <a:off x="822960" y="1554480"/>
-            <a:ext cx="5135727" cy="4617720"/>
+            <a:off x="640080" y="1783080"/>
+            <a:ext cx="5318607" cy="4389120"/>
           </a:xfrm>
           <a:prstGeom prst="roundRect">
             <a:avLst>
@@ -4345,12 +4571,10 @@
             </a:avLst>
           </a:prstGeom>
           <a:solidFill>
-            <a:srgbClr val="F4DBCD"/>
+            <a:srgbClr val="F6E1D5"/>
           </a:solidFill>
           <a:ln w="19050">
-            <a:solidFill>
-              <a:srgbClr val="995229"/>
-            </a:solidFill>
+            <a:noFill/>
             <a:prstDash val="dash"/>
           </a:ln>
         </p:spPr>
@@ -4368,7 +4592,7 @@
             <a:r>
               <a:rPr sz="1400" b="0" i="0">
                 <a:solidFill>
-                  <a:srgbClr val="492713"/>
+                  <a:srgbClr val="8E8780"/>
                 </a:solidFill>
               </a:rPr>
               <a:t>대표 사진 1</a:t>
@@ -4378,14 +4602,14 @@
       </p:sp>
       <p:sp>
         <p:nvSpPr>
-          <p:cNvPr id="6" name="사진 자리"/>
+          <p:cNvPr id="8" name="사진 자리"/>
           <p:cNvSpPr/>
           <p:nvPr/>
         </p:nvSpPr>
         <p:spPr>
           <a:xfrm>
-            <a:off x="6233007" y="1554480"/>
-            <a:ext cx="5135727" cy="4617720"/>
+            <a:off x="6233007" y="1783080"/>
+            <a:ext cx="5318607" cy="4389120"/>
           </a:xfrm>
           <a:prstGeom prst="roundRect">
             <a:avLst>
@@ -4393,12 +4617,10 @@
             </a:avLst>
           </a:prstGeom>
           <a:solidFill>
-            <a:srgbClr val="F4DBCD"/>
+            <a:srgbClr val="F6E1D5"/>
           </a:solidFill>
           <a:ln w="19050">
-            <a:solidFill>
-              <a:srgbClr val="995229"/>
-            </a:solidFill>
+            <a:noFill/>
             <a:prstDash val="dash"/>
           </a:ln>
         </p:spPr>
@@ -4416,7 +4638,7 @@
             <a:r>
               <a:rPr sz="1400" b="0" i="0">
                 <a:solidFill>
-                  <a:srgbClr val="492713"/>
+                  <a:srgbClr val="8E8780"/>
                 </a:solidFill>
               </a:rPr>
               <a:t>대표 사진 2</a:t>
@@ -4438,7 +4660,7 @@
     <p:bg>
       <p:bgPr>
         <a:solidFill>
-          <a:srgbClr val="FBF3EF"/>
+          <a:srgbClr val="FFFFFF"/>
         </a:solidFill>
         <a:effectLst/>
       </p:bgPr>
@@ -4458,46 +4680,113 @@
         </p:nvSpPr>
         <p:spPr>
           <a:xfrm>
-            <a:off x="256032" y="256032"/>
-            <a:ext cx="11679631" cy="6345936"/>
+            <a:off x="0" y="6565392"/>
+            <a:ext cx="12191695" cy="292608"/>
+          </a:xfrm>
+          <a:prstGeom prst="rect">
+            <a:avLst/>
+          </a:prstGeom>
+          <a:solidFill>
+            <a:srgbClr val="EBC4AD"/>
+          </a:solidFill>
+          <a:ln>
+            <a:noFill/>
+          </a:ln>
+        </p:spPr>
+        <p:txBody>
+          <a:bodyPr rtlCol="0" anchor="ctr"/>
+          <a:lstStyle/>
+          <a:p>
+            <a:pPr algn="ctr"/>
+          </a:p>
+        </p:txBody>
+      </p:sp>
+      <p:sp>
+        <p:nvSpPr>
+          <p:cNvPr id="4" name="장식"/>
+          <p:cNvSpPr/>
+          <p:nvPr/>
+        </p:nvSpPr>
+        <p:spPr>
+          <a:xfrm>
+            <a:off x="10180015" y="-1645920"/>
+            <a:ext cx="3474720" cy="3474720"/>
+          </a:xfrm>
+          <a:prstGeom prst="ellipse">
+            <a:avLst/>
+          </a:prstGeom>
+          <a:solidFill>
+            <a:srgbClr val="EBC4AD"/>
+          </a:solidFill>
+          <a:ln>
+            <a:noFill/>
+          </a:ln>
+        </p:spPr>
+        <p:txBody>
+          <a:bodyPr rtlCol="0" anchor="ctr"/>
+          <a:lstStyle/>
+          <a:p>
+            <a:pPr algn="ctr"/>
+          </a:p>
+        </p:txBody>
+      </p:sp>
+      <p:sp>
+        <p:nvSpPr>
+          <p:cNvPr id="5" name="상단 라벨"/>
+          <p:cNvSpPr txBox="1"/>
+          <p:nvPr/>
+        </p:nvSpPr>
+        <p:spPr>
+          <a:xfrm>
+            <a:off x="640080" y="274320"/>
+            <a:ext cx="5486400" cy="274320"/>
           </a:xfrm>
           <a:prstGeom prst="rect">
             <a:avLst/>
           </a:prstGeom>
           <a:noFill/>
-          <a:ln w="28575">
-            <a:solidFill>
-              <a:srgbClr val="995229"/>
-            </a:solidFill>
-          </a:ln>
-        </p:spPr>
-        <p:txBody>
-          <a:bodyPr rtlCol="0" anchor="ctr"/>
-          <a:lstStyle/>
-          <a:p>
-            <a:pPr algn="ctr"/>
-          </a:p>
-        </p:txBody>
-      </p:sp>
-      <p:sp>
-        <p:nvSpPr>
-          <p:cNvPr id="4" name="장식"/>
+        </p:spPr>
+        <p:txBody>
+          <a:bodyPr wrap="square" lIns="54864" rIns="54864" tIns="27432" bIns="27432" anchor="ctr">
+            <a:noAutofit/>
+          </a:bodyPr>
+          <a:lstStyle/>
+          <a:p>
+            <a:pPr algn="l">
+              <a:lnSpc>
+                <a:spcPct val="115000"/>
+              </a:lnSpc>
+            </a:pPr>
+            <a:r>
+              <a:rPr sz="900" b="1" i="0" spc="250">
+                <a:solidFill>
+                  <a:srgbClr val="26231F"/>
+                </a:solidFill>
+              </a:rPr>
+              <a:t>FIRST BIRTHDAY</a:t>
+            </a:r>
+          </a:p>
+        </p:txBody>
+      </p:sp>
+      <p:sp>
+        <p:nvSpPr>
+          <p:cNvPr id="6" name="포인트"/>
           <p:cNvSpPr/>
           <p:nvPr/>
         </p:nvSpPr>
         <p:spPr>
           <a:xfrm>
-            <a:off x="384048" y="384048"/>
-            <a:ext cx="11423599" cy="6089904"/>
-          </a:xfrm>
-          <a:prstGeom prst="rect">
+            <a:off x="11048695" y="502919"/>
+            <a:ext cx="274320" cy="274320"/>
+          </a:xfrm>
+          <a:prstGeom prst="round2SameRect">
             <a:avLst/>
           </a:prstGeom>
-          <a:noFill/>
-          <a:ln w="9525">
-            <a:solidFill>
-              <a:srgbClr val="F4DBCD"/>
-            </a:solidFill>
+          <a:solidFill>
+            <a:srgbClr val="FFFFFF"/>
+          </a:solidFill>
+          <a:ln>
+            <a:noFill/>
           </a:ln>
         </p:spPr>
         <p:txBody>
@@ -4520,8 +4809,8 @@
         </p:nvSpPr>
         <p:spPr>
           <a:xfrm>
-            <a:off x="822960" y="548640"/>
-            <a:ext cx="9265615" cy="822960"/>
+            <a:off x="640080" y="658368"/>
+            <a:ext cx="9082735" cy="868680"/>
           </a:xfrm>
         </p:spPr>
         <p:txBody>
@@ -4538,7 +4827,7 @@
             <a:r>
               <a:rPr sz="3000" b="1" i="0">
                 <a:solidFill>
-                  <a:srgbClr val="492713"/>
+                  <a:srgbClr val="26231F"/>
                 </a:solidFill>
               </a:rPr>
               <a:t>한 해의 순간들</a:t>
@@ -4548,14 +4837,14 @@
       </p:sp>
       <p:sp>
         <p:nvSpPr>
-          <p:cNvPr id="5" name="사진 자리"/>
+          <p:cNvPr id="7" name="사진 자리"/>
           <p:cNvSpPr/>
           <p:nvPr/>
         </p:nvSpPr>
         <p:spPr>
           <a:xfrm>
-            <a:off x="822960" y="1554480"/>
-            <a:ext cx="3393338" cy="2217420"/>
+            <a:off x="640080" y="1783080"/>
+            <a:ext cx="3515258" cy="2103120"/>
           </a:xfrm>
           <a:prstGeom prst="roundRect">
             <a:avLst>
@@ -4563,12 +4852,10 @@
             </a:avLst>
           </a:prstGeom>
           <a:solidFill>
-            <a:srgbClr val="F4DBCD"/>
+            <a:srgbClr val="F6E1D5"/>
           </a:solidFill>
           <a:ln w="19050">
-            <a:solidFill>
-              <a:srgbClr val="995229"/>
-            </a:solidFill>
+            <a:noFill/>
             <a:prstDash val="dash"/>
           </a:ln>
         </p:spPr>
@@ -4586,7 +4873,7 @@
             <a:r>
               <a:rPr sz="1200" b="0" i="0">
                 <a:solidFill>
-                  <a:srgbClr val="492713"/>
+                  <a:srgbClr val="8E8780"/>
                 </a:solidFill>
               </a:rPr>
               <a:t>사진 1</a:t>
@@ -4596,14 +4883,14 @@
       </p:sp>
       <p:sp>
         <p:nvSpPr>
-          <p:cNvPr id="6" name="사진 자리"/>
+          <p:cNvPr id="8" name="사진 자리"/>
           <p:cNvSpPr/>
           <p:nvPr/>
         </p:nvSpPr>
         <p:spPr>
           <a:xfrm>
-            <a:off x="4399178" y="1554480"/>
-            <a:ext cx="3393338" cy="2217420"/>
+            <a:off x="4338218" y="1783080"/>
+            <a:ext cx="3515258" cy="2103120"/>
           </a:xfrm>
           <a:prstGeom prst="roundRect">
             <a:avLst>
@@ -4611,12 +4898,10 @@
             </a:avLst>
           </a:prstGeom>
           <a:solidFill>
-            <a:srgbClr val="F4DBCD"/>
+            <a:srgbClr val="F6E1D5"/>
           </a:solidFill>
           <a:ln w="19050">
-            <a:solidFill>
-              <a:srgbClr val="995229"/>
-            </a:solidFill>
+            <a:noFill/>
             <a:prstDash val="dash"/>
           </a:ln>
         </p:spPr>
@@ -4634,7 +4919,7 @@
             <a:r>
               <a:rPr sz="1200" b="0" i="0">
                 <a:solidFill>
-                  <a:srgbClr val="492713"/>
+                  <a:srgbClr val="8E8780"/>
                 </a:solidFill>
               </a:rPr>
               <a:t>사진 2</a:t>
@@ -4644,14 +4929,14 @@
       </p:sp>
       <p:sp>
         <p:nvSpPr>
-          <p:cNvPr id="7" name="사진 자리"/>
+          <p:cNvPr id="9" name="사진 자리"/>
           <p:cNvSpPr/>
           <p:nvPr/>
         </p:nvSpPr>
         <p:spPr>
           <a:xfrm>
-            <a:off x="7975396" y="1554480"/>
-            <a:ext cx="3393338" cy="2217420"/>
+            <a:off x="8036356" y="1783080"/>
+            <a:ext cx="3515258" cy="2103120"/>
           </a:xfrm>
           <a:prstGeom prst="roundRect">
             <a:avLst>
@@ -4659,12 +4944,10 @@
             </a:avLst>
           </a:prstGeom>
           <a:solidFill>
-            <a:srgbClr val="F4DBCD"/>
+            <a:srgbClr val="F6E1D5"/>
           </a:solidFill>
           <a:ln w="19050">
-            <a:solidFill>
-              <a:srgbClr val="995229"/>
-            </a:solidFill>
+            <a:noFill/>
             <a:prstDash val="dash"/>
           </a:ln>
         </p:spPr>
@@ -4682,7 +4965,7 @@
             <a:r>
               <a:rPr sz="1200" b="0" i="0">
                 <a:solidFill>
-                  <a:srgbClr val="492713"/>
+                  <a:srgbClr val="8E8780"/>
                 </a:solidFill>
               </a:rPr>
               <a:t>사진 3</a:t>
@@ -4692,14 +4975,14 @@
       </p:sp>
       <p:sp>
         <p:nvSpPr>
-          <p:cNvPr id="8" name="사진 자리"/>
+          <p:cNvPr id="10" name="사진 자리"/>
           <p:cNvSpPr/>
           <p:nvPr/>
         </p:nvSpPr>
         <p:spPr>
           <a:xfrm>
-            <a:off x="822960" y="3954780"/>
-            <a:ext cx="3393338" cy="2217420"/>
+            <a:off x="640080" y="4069080"/>
+            <a:ext cx="3515258" cy="2103120"/>
           </a:xfrm>
           <a:prstGeom prst="roundRect">
             <a:avLst>
@@ -4707,12 +4990,10 @@
             </a:avLst>
           </a:prstGeom>
           <a:solidFill>
-            <a:srgbClr val="F4DBCD"/>
+            <a:srgbClr val="F6E1D5"/>
           </a:solidFill>
           <a:ln w="19050">
-            <a:solidFill>
-              <a:srgbClr val="995229"/>
-            </a:solidFill>
+            <a:noFill/>
             <a:prstDash val="dash"/>
           </a:ln>
         </p:spPr>
@@ -4730,7 +5011,7 @@
             <a:r>
               <a:rPr sz="1200" b="0" i="0">
                 <a:solidFill>
-                  <a:srgbClr val="492713"/>
+                  <a:srgbClr val="8E8780"/>
                 </a:solidFill>
               </a:rPr>
               <a:t>사진 4</a:t>
@@ -4740,14 +5021,14 @@
       </p:sp>
       <p:sp>
         <p:nvSpPr>
-          <p:cNvPr id="9" name="사진 자리"/>
+          <p:cNvPr id="11" name="사진 자리"/>
           <p:cNvSpPr/>
           <p:nvPr/>
         </p:nvSpPr>
         <p:spPr>
           <a:xfrm>
-            <a:off x="4399178" y="3954780"/>
-            <a:ext cx="3393338" cy="2217420"/>
+            <a:off x="4338218" y="4069080"/>
+            <a:ext cx="3515258" cy="2103120"/>
           </a:xfrm>
           <a:prstGeom prst="roundRect">
             <a:avLst>
@@ -4755,12 +5036,10 @@
             </a:avLst>
           </a:prstGeom>
           <a:solidFill>
-            <a:srgbClr val="F4DBCD"/>
+            <a:srgbClr val="F6E1D5"/>
           </a:solidFill>
           <a:ln w="19050">
-            <a:solidFill>
-              <a:srgbClr val="995229"/>
-            </a:solidFill>
+            <a:noFill/>
             <a:prstDash val="dash"/>
           </a:ln>
         </p:spPr>
@@ -4778,7 +5057,7 @@
             <a:r>
               <a:rPr sz="1200" b="0" i="0">
                 <a:solidFill>
-                  <a:srgbClr val="492713"/>
+                  <a:srgbClr val="8E8780"/>
                 </a:solidFill>
               </a:rPr>
               <a:t>사진 5</a:t>
@@ -4788,14 +5067,14 @@
       </p:sp>
       <p:sp>
         <p:nvSpPr>
-          <p:cNvPr id="10" name="사진 자리"/>
+          <p:cNvPr id="12" name="사진 자리"/>
           <p:cNvSpPr/>
           <p:nvPr/>
         </p:nvSpPr>
         <p:spPr>
           <a:xfrm>
-            <a:off x="7975396" y="3954780"/>
-            <a:ext cx="3393338" cy="2217420"/>
+            <a:off x="8036356" y="4069080"/>
+            <a:ext cx="3515258" cy="2103120"/>
           </a:xfrm>
           <a:prstGeom prst="roundRect">
             <a:avLst>
@@ -4803,12 +5082,10 @@
             </a:avLst>
           </a:prstGeom>
           <a:solidFill>
-            <a:srgbClr val="F4DBCD"/>
+            <a:srgbClr val="F6E1D5"/>
           </a:solidFill>
           <a:ln w="19050">
-            <a:solidFill>
-              <a:srgbClr val="995229"/>
-            </a:solidFill>
+            <a:noFill/>
             <a:prstDash val="dash"/>
           </a:ln>
         </p:spPr>
@@ -4826,7 +5103,7 @@
             <a:r>
               <a:rPr sz="1200" b="0" i="0">
                 <a:solidFill>
-                  <a:srgbClr val="492713"/>
+                  <a:srgbClr val="8E8780"/>
                 </a:solidFill>
               </a:rPr>
               <a:t>사진 6</a:t>
@@ -4848,7 +5125,7 @@
     <p:bg>
       <p:bgPr>
         <a:solidFill>
-          <a:srgbClr val="FBF3EF"/>
+          <a:srgbClr val="FFFFFF"/>
         </a:solidFill>
         <a:effectLst/>
       </p:bgPr>
@@ -4868,46 +5145,113 @@
         </p:nvSpPr>
         <p:spPr>
           <a:xfrm>
-            <a:off x="256032" y="256032"/>
-            <a:ext cx="11679631" cy="6345936"/>
+            <a:off x="0" y="6565392"/>
+            <a:ext cx="12191695" cy="292608"/>
+          </a:xfrm>
+          <a:prstGeom prst="rect">
+            <a:avLst/>
+          </a:prstGeom>
+          <a:solidFill>
+            <a:srgbClr val="EBC4AD"/>
+          </a:solidFill>
+          <a:ln>
+            <a:noFill/>
+          </a:ln>
+        </p:spPr>
+        <p:txBody>
+          <a:bodyPr rtlCol="0" anchor="ctr"/>
+          <a:lstStyle/>
+          <a:p>
+            <a:pPr algn="ctr"/>
+          </a:p>
+        </p:txBody>
+      </p:sp>
+      <p:sp>
+        <p:nvSpPr>
+          <p:cNvPr id="4" name="장식"/>
+          <p:cNvSpPr/>
+          <p:nvPr/>
+        </p:nvSpPr>
+        <p:spPr>
+          <a:xfrm>
+            <a:off x="10180015" y="-1645920"/>
+            <a:ext cx="3474720" cy="3474720"/>
+          </a:xfrm>
+          <a:prstGeom prst="ellipse">
+            <a:avLst/>
+          </a:prstGeom>
+          <a:solidFill>
+            <a:srgbClr val="EBC4AD"/>
+          </a:solidFill>
+          <a:ln>
+            <a:noFill/>
+          </a:ln>
+        </p:spPr>
+        <p:txBody>
+          <a:bodyPr rtlCol="0" anchor="ctr"/>
+          <a:lstStyle/>
+          <a:p>
+            <a:pPr algn="ctr"/>
+          </a:p>
+        </p:txBody>
+      </p:sp>
+      <p:sp>
+        <p:nvSpPr>
+          <p:cNvPr id="5" name="상단 라벨"/>
+          <p:cNvSpPr txBox="1"/>
+          <p:nvPr/>
+        </p:nvSpPr>
+        <p:spPr>
+          <a:xfrm>
+            <a:off x="640080" y="274320"/>
+            <a:ext cx="5486400" cy="274320"/>
           </a:xfrm>
           <a:prstGeom prst="rect">
             <a:avLst/>
           </a:prstGeom>
           <a:noFill/>
-          <a:ln w="28575">
-            <a:solidFill>
-              <a:srgbClr val="995229"/>
-            </a:solidFill>
-          </a:ln>
-        </p:spPr>
-        <p:txBody>
-          <a:bodyPr rtlCol="0" anchor="ctr"/>
-          <a:lstStyle/>
-          <a:p>
-            <a:pPr algn="ctr"/>
-          </a:p>
-        </p:txBody>
-      </p:sp>
-      <p:sp>
-        <p:nvSpPr>
-          <p:cNvPr id="4" name="장식"/>
+        </p:spPr>
+        <p:txBody>
+          <a:bodyPr wrap="square" lIns="54864" rIns="54864" tIns="27432" bIns="27432" anchor="ctr">
+            <a:noAutofit/>
+          </a:bodyPr>
+          <a:lstStyle/>
+          <a:p>
+            <a:pPr algn="l">
+              <a:lnSpc>
+                <a:spcPct val="115000"/>
+              </a:lnSpc>
+            </a:pPr>
+            <a:r>
+              <a:rPr sz="900" b="1" i="0" spc="250">
+                <a:solidFill>
+                  <a:srgbClr val="26231F"/>
+                </a:solidFill>
+              </a:rPr>
+              <a:t>FIRST BIRTHDAY</a:t>
+            </a:r>
+          </a:p>
+        </p:txBody>
+      </p:sp>
+      <p:sp>
+        <p:nvSpPr>
+          <p:cNvPr id="6" name="포인트"/>
           <p:cNvSpPr/>
           <p:nvPr/>
         </p:nvSpPr>
         <p:spPr>
           <a:xfrm>
-            <a:off x="384048" y="384048"/>
-            <a:ext cx="11423599" cy="6089904"/>
-          </a:xfrm>
-          <a:prstGeom prst="rect">
+            <a:off x="11048695" y="502919"/>
+            <a:ext cx="274320" cy="274320"/>
+          </a:xfrm>
+          <a:prstGeom prst="round2SameRect">
             <a:avLst/>
           </a:prstGeom>
-          <a:noFill/>
-          <a:ln w="9525">
-            <a:solidFill>
-              <a:srgbClr val="F4DBCD"/>
-            </a:solidFill>
+          <a:solidFill>
+            <a:srgbClr val="FFFFFF"/>
+          </a:solidFill>
+          <a:ln>
+            <a:noFill/>
           </a:ln>
         </p:spPr>
         <p:txBody>
@@ -4930,8 +5274,8 @@
         </p:nvSpPr>
         <p:spPr>
           <a:xfrm>
-            <a:off x="822960" y="548640"/>
-            <a:ext cx="9265615" cy="822960"/>
+            <a:off x="640080" y="658368"/>
+            <a:ext cx="9082735" cy="868680"/>
           </a:xfrm>
         </p:spPr>
         <p:txBody>
@@ -4948,7 +5292,7 @@
             <a:r>
               <a:rPr sz="3000" b="1" i="0">
                 <a:solidFill>
-                  <a:srgbClr val="492713"/>
+                  <a:srgbClr val="26231F"/>
                 </a:solidFill>
               </a:rPr>
               <a:t>사진 모음</a:t>
@@ -4958,14 +5302,14 @@
       </p:sp>
       <p:sp>
         <p:nvSpPr>
-          <p:cNvPr id="5" name="사진 자리"/>
+          <p:cNvPr id="7" name="사진 자리"/>
           <p:cNvSpPr/>
           <p:nvPr/>
         </p:nvSpPr>
         <p:spPr>
           <a:xfrm>
-            <a:off x="822960" y="1554480"/>
-            <a:ext cx="2499283" cy="2217420"/>
+            <a:off x="640080" y="1783080"/>
+            <a:ext cx="2590723" cy="2103120"/>
           </a:xfrm>
           <a:prstGeom prst="roundRect">
             <a:avLst>
@@ -4973,12 +5317,10 @@
             </a:avLst>
           </a:prstGeom>
           <a:solidFill>
-            <a:srgbClr val="F4DBCD"/>
+            <a:srgbClr val="F6E1D5"/>
           </a:solidFill>
           <a:ln w="19050">
-            <a:solidFill>
-              <a:srgbClr val="995229"/>
-            </a:solidFill>
+            <a:noFill/>
             <a:prstDash val="dash"/>
           </a:ln>
         </p:spPr>
@@ -4996,7 +5338,7 @@
             <a:r>
               <a:rPr sz="1200" b="0" i="0">
                 <a:solidFill>
-                  <a:srgbClr val="492713"/>
+                  <a:srgbClr val="8E8780"/>
                 </a:solidFill>
               </a:rPr>
               <a:t>사진 1</a:t>
@@ -5006,14 +5348,14 @@
       </p:sp>
       <p:sp>
         <p:nvSpPr>
-          <p:cNvPr id="6" name="사진 자리"/>
+          <p:cNvPr id="8" name="사진 자리"/>
           <p:cNvSpPr/>
           <p:nvPr/>
         </p:nvSpPr>
         <p:spPr>
           <a:xfrm>
-            <a:off x="3505123" y="1554480"/>
-            <a:ext cx="2499283" cy="2217420"/>
+            <a:off x="3413683" y="1783080"/>
+            <a:ext cx="2590723" cy="2103120"/>
           </a:xfrm>
           <a:prstGeom prst="roundRect">
             <a:avLst>
@@ -5021,12 +5363,10 @@
             </a:avLst>
           </a:prstGeom>
           <a:solidFill>
-            <a:srgbClr val="F4DBCD"/>
+            <a:srgbClr val="F6E1D5"/>
           </a:solidFill>
           <a:ln w="19050">
-            <a:solidFill>
-              <a:srgbClr val="995229"/>
-            </a:solidFill>
+            <a:noFill/>
             <a:prstDash val="dash"/>
           </a:ln>
         </p:spPr>
@@ -5044,7 +5384,7 @@
             <a:r>
               <a:rPr sz="1200" b="0" i="0">
                 <a:solidFill>
-                  <a:srgbClr val="492713"/>
+                  <a:srgbClr val="8E8780"/>
                 </a:solidFill>
               </a:rPr>
               <a:t>사진 2</a:t>
@@ -5054,14 +5394,14 @@
       </p:sp>
       <p:sp>
         <p:nvSpPr>
-          <p:cNvPr id="7" name="사진 자리"/>
+          <p:cNvPr id="9" name="사진 자리"/>
           <p:cNvSpPr/>
           <p:nvPr/>
         </p:nvSpPr>
         <p:spPr>
           <a:xfrm>
-            <a:off x="6187287" y="1554480"/>
-            <a:ext cx="2499283" cy="2217420"/>
+            <a:off x="6187287" y="1783080"/>
+            <a:ext cx="2590723" cy="2103120"/>
           </a:xfrm>
           <a:prstGeom prst="roundRect">
             <a:avLst>
@@ -5069,12 +5409,10 @@
             </a:avLst>
           </a:prstGeom>
           <a:solidFill>
-            <a:srgbClr val="F4DBCD"/>
+            <a:srgbClr val="F6E1D5"/>
           </a:solidFill>
           <a:ln w="19050">
-            <a:solidFill>
-              <a:srgbClr val="995229"/>
-            </a:solidFill>
+            <a:noFill/>
             <a:prstDash val="dash"/>
           </a:ln>
         </p:spPr>
@@ -5092,7 +5430,7 @@
             <a:r>
               <a:rPr sz="1200" b="0" i="0">
                 <a:solidFill>
-                  <a:srgbClr val="492713"/>
+                  <a:srgbClr val="8E8780"/>
                 </a:solidFill>
               </a:rPr>
               <a:t>사진 3</a:t>
@@ -5102,14 +5440,14 @@
       </p:sp>
       <p:sp>
         <p:nvSpPr>
-          <p:cNvPr id="8" name="사진 자리"/>
+          <p:cNvPr id="10" name="사진 자리"/>
           <p:cNvSpPr/>
           <p:nvPr/>
         </p:nvSpPr>
         <p:spPr>
           <a:xfrm>
-            <a:off x="8869451" y="1554480"/>
-            <a:ext cx="2499283" cy="2217420"/>
+            <a:off x="8960891" y="1783080"/>
+            <a:ext cx="2590723" cy="2103120"/>
           </a:xfrm>
           <a:prstGeom prst="roundRect">
             <a:avLst>
@@ -5117,12 +5455,10 @@
             </a:avLst>
           </a:prstGeom>
           <a:solidFill>
-            <a:srgbClr val="F4DBCD"/>
+            <a:srgbClr val="F6E1D5"/>
           </a:solidFill>
           <a:ln w="19050">
-            <a:solidFill>
-              <a:srgbClr val="995229"/>
-            </a:solidFill>
+            <a:noFill/>
             <a:prstDash val="dash"/>
           </a:ln>
         </p:spPr>
@@ -5140,7 +5476,7 @@
             <a:r>
               <a:rPr sz="1200" b="0" i="0">
                 <a:solidFill>
-                  <a:srgbClr val="492713"/>
+                  <a:srgbClr val="8E8780"/>
                 </a:solidFill>
               </a:rPr>
               <a:t>사진 4</a:t>
@@ -5150,14 +5486,14 @@
       </p:sp>
       <p:sp>
         <p:nvSpPr>
-          <p:cNvPr id="9" name="사진 자리"/>
+          <p:cNvPr id="11" name="사진 자리"/>
           <p:cNvSpPr/>
           <p:nvPr/>
         </p:nvSpPr>
         <p:spPr>
           <a:xfrm>
-            <a:off x="822960" y="3954780"/>
-            <a:ext cx="2499283" cy="2217420"/>
+            <a:off x="640080" y="4069080"/>
+            <a:ext cx="2590723" cy="2103120"/>
           </a:xfrm>
           <a:prstGeom prst="roundRect">
             <a:avLst>
@@ -5165,12 +5501,10 @@
             </a:avLst>
           </a:prstGeom>
           <a:solidFill>
-            <a:srgbClr val="F4DBCD"/>
+            <a:srgbClr val="F6E1D5"/>
           </a:solidFill>
           <a:ln w="19050">
-            <a:solidFill>
-              <a:srgbClr val="995229"/>
-            </a:solidFill>
+            <a:noFill/>
             <a:prstDash val="dash"/>
           </a:ln>
         </p:spPr>
@@ -5188,7 +5522,7 @@
             <a:r>
               <a:rPr sz="1200" b="0" i="0">
                 <a:solidFill>
-                  <a:srgbClr val="492713"/>
+                  <a:srgbClr val="8E8780"/>
                 </a:solidFill>
               </a:rPr>
               <a:t>사진 5</a:t>
@@ -5198,14 +5532,14 @@
       </p:sp>
       <p:sp>
         <p:nvSpPr>
-          <p:cNvPr id="10" name="사진 자리"/>
+          <p:cNvPr id="12" name="사진 자리"/>
           <p:cNvSpPr/>
           <p:nvPr/>
         </p:nvSpPr>
         <p:spPr>
           <a:xfrm>
-            <a:off x="3505123" y="3954780"/>
-            <a:ext cx="2499283" cy="2217420"/>
+            <a:off x="3413683" y="4069080"/>
+            <a:ext cx="2590723" cy="2103120"/>
           </a:xfrm>
           <a:prstGeom prst="roundRect">
             <a:avLst>
@@ -5213,12 +5547,10 @@
             </a:avLst>
           </a:prstGeom>
           <a:solidFill>
-            <a:srgbClr val="F4DBCD"/>
+            <a:srgbClr val="F6E1D5"/>
           </a:solidFill>
           <a:ln w="19050">
-            <a:solidFill>
-              <a:srgbClr val="995229"/>
-            </a:solidFill>
+            <a:noFill/>
             <a:prstDash val="dash"/>
           </a:ln>
         </p:spPr>
@@ -5236,7 +5568,7 @@
             <a:r>
               <a:rPr sz="1200" b="0" i="0">
                 <a:solidFill>
-                  <a:srgbClr val="492713"/>
+                  <a:srgbClr val="8E8780"/>
                 </a:solidFill>
               </a:rPr>
               <a:t>사진 6</a:t>
@@ -5246,14 +5578,14 @@
       </p:sp>
       <p:sp>
         <p:nvSpPr>
-          <p:cNvPr id="11" name="사진 자리"/>
+          <p:cNvPr id="13" name="사진 자리"/>
           <p:cNvSpPr/>
           <p:nvPr/>
         </p:nvSpPr>
         <p:spPr>
           <a:xfrm>
-            <a:off x="6187287" y="3954780"/>
-            <a:ext cx="2499283" cy="2217420"/>
+            <a:off x="6187287" y="4069080"/>
+            <a:ext cx="2590723" cy="2103120"/>
           </a:xfrm>
           <a:prstGeom prst="roundRect">
             <a:avLst>
@@ -5261,12 +5593,10 @@
             </a:avLst>
           </a:prstGeom>
           <a:solidFill>
-            <a:srgbClr val="F4DBCD"/>
+            <a:srgbClr val="F6E1D5"/>
           </a:solidFill>
           <a:ln w="19050">
-            <a:solidFill>
-              <a:srgbClr val="995229"/>
-            </a:solidFill>
+            <a:noFill/>
             <a:prstDash val="dash"/>
           </a:ln>
         </p:spPr>
@@ -5284,7 +5614,7 @@
             <a:r>
               <a:rPr sz="1200" b="0" i="0">
                 <a:solidFill>
-                  <a:srgbClr val="492713"/>
+                  <a:srgbClr val="8E8780"/>
                 </a:solidFill>
               </a:rPr>
               <a:t>사진 7</a:t>
@@ -5294,14 +5624,14 @@
       </p:sp>
       <p:sp>
         <p:nvSpPr>
-          <p:cNvPr id="12" name="사진 자리"/>
+          <p:cNvPr id="14" name="사진 자리"/>
           <p:cNvSpPr/>
           <p:nvPr/>
         </p:nvSpPr>
         <p:spPr>
           <a:xfrm>
-            <a:off x="8869451" y="3954780"/>
-            <a:ext cx="2499283" cy="2217420"/>
+            <a:off x="8960891" y="4069080"/>
+            <a:ext cx="2590723" cy="2103120"/>
           </a:xfrm>
           <a:prstGeom prst="roundRect">
             <a:avLst>
@@ -5309,12 +5639,10 @@
             </a:avLst>
           </a:prstGeom>
           <a:solidFill>
-            <a:srgbClr val="F4DBCD"/>
+            <a:srgbClr val="F6E1D5"/>
           </a:solidFill>
           <a:ln w="19050">
-            <a:solidFill>
-              <a:srgbClr val="995229"/>
-            </a:solidFill>
+            <a:noFill/>
             <a:prstDash val="dash"/>
           </a:ln>
         </p:spPr>
@@ -5332,7 +5660,7 @@
             <a:r>
               <a:rPr sz="1200" b="0" i="0">
                 <a:solidFill>
-                  <a:srgbClr val="492713"/>
+                  <a:srgbClr val="8E8780"/>
                 </a:solidFill>
               </a:rPr>
               <a:t>사진 8</a:t>
@@ -5351,6 +5679,14 @@
 <file path=ppt/slides/slide6.xml><?xml version="1.0" encoding="utf-8"?>
 <p:sld xmlns:a="http://schemas.openxmlformats.org/drawingml/2006/main" xmlns:p="http://schemas.openxmlformats.org/presentationml/2006/main" xmlns:r="http://schemas.openxmlformats.org/officeDocument/2006/relationships">
   <p:cSld>
+    <p:bg>
+      <p:bgPr>
+        <a:solidFill>
+          <a:srgbClr val="F6E1D5"/>
+        </a:solidFill>
+        <a:effectLst/>
+      </p:bgPr>
+    </p:bg>
     <p:spTree>
       <p:nvGrpSpPr>
         <p:cNvPr id="1" name=""/>
@@ -5358,30 +5694,116 @@
         <p:nvPr/>
       </p:nvGrpSpPr>
       <p:grpSpPr/>
-      <p:pic>
-        <p:nvPicPr>
-          <p:cNvPr id="3" name="표지 그림" descr="birthday-38.jpg"/>
-          <p:cNvPicPr>
-            <a:picLocks noChangeAspect="1"/>
-          </p:cNvPicPr>
+      <p:sp>
+        <p:nvSpPr>
+          <p:cNvPr id="3" name="사진 자리"/>
+          <p:cNvSpPr/>
           <p:nvPr/>
-        </p:nvPicPr>
-        <p:blipFill>
-          <a:blip r:embed="rId2"/>
-          <a:stretch>
-            <a:fillRect/>
-          </a:stretch>
-        </p:blipFill>
-        <p:spPr>
-          <a:xfrm>
-            <a:off x="0" y="0"/>
-            <a:ext cx="12191695" cy="6858000"/>
+        </p:nvSpPr>
+        <p:spPr>
+          <a:xfrm>
+            <a:off x="7802684" y="0"/>
+            <a:ext cx="4389010" cy="6858000"/>
           </a:xfrm>
           <a:prstGeom prst="rect">
             <a:avLst/>
           </a:prstGeom>
-        </p:spPr>
-      </p:pic>
+          <a:solidFill>
+            <a:srgbClr val="EBC4AD"/>
+          </a:solidFill>
+          <a:ln>
+            <a:noFill/>
+          </a:ln>
+        </p:spPr>
+        <p:txBody>
+          <a:bodyPr rtlCol="0" anchor="ctr" wrap="square" lIns="54864" rIns="54864" tIns="27432" bIns="27432">
+            <a:noAutofit/>
+          </a:bodyPr>
+          <a:lstStyle/>
+          <a:p>
+            <a:pPr algn="ctr">
+              <a:lnSpc>
+                <a:spcPct val="100000"/>
+              </a:lnSpc>
+            </a:pPr>
+            <a:r>
+              <a:rPr sz="1400" b="0" i="0">
+                <a:solidFill>
+                  <a:srgbClr val="493427"/>
+                </a:solidFill>
+              </a:rPr>
+              <a:t>사진을 넣어 주세요</a:t>
+            </a:r>
+          </a:p>
+        </p:txBody>
+      </p:sp>
+      <p:sp>
+        <p:nvSpPr>
+          <p:cNvPr id="4" name="장식"/>
+          <p:cNvSpPr/>
+          <p:nvPr/>
+        </p:nvSpPr>
+        <p:spPr>
+          <a:xfrm>
+            <a:off x="8168435" y="365760"/>
+            <a:ext cx="3657508" cy="6126480"/>
+          </a:xfrm>
+          <a:prstGeom prst="rect">
+            <a:avLst/>
+          </a:prstGeom>
+          <a:noFill/>
+          <a:ln w="9525">
+            <a:solidFill>
+              <a:srgbClr val="26231F"/>
+            </a:solidFill>
+          </a:ln>
+        </p:spPr>
+        <p:txBody>
+          <a:bodyPr rtlCol="0" anchor="ctr"/>
+          <a:lstStyle/>
+          <a:p>
+            <a:pPr algn="ctr"/>
+          </a:p>
+        </p:txBody>
+      </p:sp>
+      <p:sp>
+        <p:nvSpPr>
+          <p:cNvPr id="5" name="라벨"/>
+          <p:cNvSpPr txBox="1"/>
+          <p:nvPr/>
+        </p:nvSpPr>
+        <p:spPr>
+          <a:xfrm>
+            <a:off x="822960" y="2148840"/>
+            <a:ext cx="5608179" cy="274320"/>
+          </a:xfrm>
+          <a:prstGeom prst="rect">
+            <a:avLst/>
+          </a:prstGeom>
+          <a:noFill/>
+        </p:spPr>
+        <p:txBody>
+          <a:bodyPr wrap="square" lIns="54864" rIns="54864" tIns="27432" bIns="27432" anchor="t">
+            <a:noAutofit/>
+          </a:bodyPr>
+          <a:lstStyle/>
+          <a:p>
+            <a:pPr algn="l">
+              <a:lnSpc>
+                <a:spcPct val="115000"/>
+              </a:lnSpc>
+            </a:pPr>
+            <a:r>
+              <a:rPr sz="1000" b="1" i="0" spc="250">
+                <a:solidFill>
+                  <a:srgbClr val="26231F"/>
+                </a:solidFill>
+              </a:rPr>
+              <a:t>FIRST BIRTHDAY</a:t>
+            </a:r>
+          </a:p>
+        </p:txBody>
+      </p:sp>
       <p:sp>
         <p:nvSpPr>
           <p:cNvPr id="2" name="Title 1"/>
@@ -5394,8 +5816,8 @@
         </p:nvSpPr>
         <p:spPr>
           <a:xfrm>
-            <a:off x="853418" y="2057400"/>
-            <a:ext cx="6095847" cy="1554480"/>
+            <a:off x="822960" y="2606040"/>
+            <a:ext cx="5608179" cy="1188720"/>
           </a:xfrm>
         </p:spPr>
         <p:txBody>
@@ -5412,7 +5834,7 @@
             <a:r>
               <a:rPr sz="3400" b="1" i="0">
                 <a:solidFill>
-                  <a:srgbClr val="492713"/>
+                  <a:srgbClr val="26231F"/>
                 </a:solidFill>
               </a:rPr>
               <a:t>와 주셔서 고맙습니다</a:t>
@@ -5422,14 +5844,14 @@
       </p:sp>
       <p:sp>
         <p:nvSpPr>
-          <p:cNvPr id="4" name="한 줄 문구"/>
+          <p:cNvPr id="6" name="한 줄 문구"/>
           <p:cNvSpPr txBox="1"/>
           <p:nvPr/>
         </p:nvSpPr>
         <p:spPr>
           <a:xfrm>
-            <a:off x="853418" y="3749039"/>
-            <a:ext cx="6095847" cy="822960"/>
+            <a:off x="822960" y="3886200"/>
+            <a:ext cx="5608179" cy="822960"/>
           </a:xfrm>
           <a:prstGeom prst="rect">
             <a:avLst/>
@@ -5448,9 +5870,9 @@
               </a:lnSpc>
             </a:pPr>
             <a:r>
-              <a:rPr sz="1700" b="0" i="1">
+              <a:rPr sz="1700" b="0" i="0">
                 <a:solidFill>
-                  <a:srgbClr val="492713"/>
+                  <a:srgbClr val="26231F"/>
                 </a:solidFill>
               </a:rPr>
               <a:t>아이가 한 살이 되었습니다</a:t>
@@ -5460,14 +5882,14 @@
       </p:sp>
       <p:sp>
         <p:nvSpPr>
-          <p:cNvPr id="5" name="안내 문구"/>
+          <p:cNvPr id="7" name="안내 문구"/>
           <p:cNvSpPr txBox="1"/>
           <p:nvPr/>
         </p:nvSpPr>
         <p:spPr>
           <a:xfrm>
-            <a:off x="853418" y="4617720"/>
-            <a:ext cx="6095847" cy="914400"/>
+            <a:off x="822960" y="4754880"/>
+            <a:ext cx="5608179" cy="914400"/>
           </a:xfrm>
           <a:prstGeom prst="rect">
             <a:avLst/>
@@ -5488,7 +5910,7 @@
             <a:r>
               <a:rPr sz="1400" b="0" i="0">
                 <a:solidFill>
-                  <a:srgbClr val="666666"/>
+                  <a:srgbClr val="26231F"/>
                 </a:solidFill>
               </a:rPr>
               <a:t>아기 이름 · 부모 이름</a:t>
@@ -5515,34 +5937,34 @@
         <a:sysClr val="window" lastClr="FFFFFF"/>
       </a:lt1>
       <a:dk2>
-        <a:srgbClr val="492713"/>
+        <a:srgbClr val="493427"/>
       </a:dk2>
       <a:lt2>
-        <a:srgbClr val="FBF3EF"/>
+        <a:srgbClr val="FBF2EC"/>
       </a:lt2>
       <a:accent1>
-        <a:srgbClr val="995229"/>
+        <a:srgbClr val="D89C79"/>
       </a:accent1>
       <a:accent2>
-        <a:srgbClr val="3B9185"/>
+        <a:srgbClr val="E1D598"/>
       </a:accent2>
       <a:accent3>
-        <a:srgbClr val="492713"/>
+        <a:srgbClr val="493427"/>
       </a:accent3>
       <a:accent4>
-        <a:srgbClr val="F4DBCD"/>
+        <a:srgbClr val="F6E1D5"/>
       </a:accent4>
       <a:accent5>
-        <a:srgbClr val="6A7257"/>
+        <a:srgbClr val="DCB888"/>
       </a:accent5>
       <a:accent6>
-        <a:srgbClr val="927D71"/>
+        <a:srgbClr val="92857D"/>
       </a:accent6>
       <a:hlink>
-        <a:srgbClr val="995229"/>
+        <a:srgbClr val="D89C79"/>
       </a:hlink>
       <a:folHlink>
-        <a:srgbClr val="492713"/>
+        <a:srgbClr val="493427"/>
       </a:folHlink>
     </a:clrScheme>
     <a:fontScheme name="Office">
